--- a/public/templates/office/EMP_INT_000_착수보고서.pptx
+++ b/public/templates/office/EMP_INT_000_착수보고서.pptx
@@ -333,7 +333,7 @@
             </a:r>
             <a:r>
               <a:rPr lang="en-US" altLang="ko-KR" dirty="0"/>
-              <a:t>SyncGuard AI </a:t>
+              <a:t>SyncFlow AI </a:t>
             </a:r>
             <a:r>
               <a:rPr lang="ko-KR" altLang="en-US" dirty="0"/>
@@ -374,7 +374,7 @@
             </a:r>
             <a:r>
               <a:rPr lang="ko-KR" altLang="en-US" dirty="0" err="1"/>
-              <a:t>마케팅허브등에</a:t>
+              <a:t>전자구매포털등에</a:t>
             </a:r>
             <a:r>
               <a:rPr lang="ko-KR" altLang="en-US" dirty="0"/>
@@ -432,7 +432,7 @@
             </a:r>
             <a:r>
               <a:rPr lang="ko-KR" altLang="en-US" dirty="0" err="1"/>
-              <a:t>마케터분들과</a:t>
+              <a:t>구매담당자분들과</a:t>
             </a:r>
             <a:r>
               <a:rPr lang="ko-KR" altLang="en-US" dirty="0"/>
@@ -440,7 +440,7 @@
             </a:r>
             <a:r>
               <a:rPr lang="en-US" altLang="ko-KR" dirty="0"/>
-              <a:t>RA </a:t>
+              <a:t>QA </a:t>
             </a:r>
             <a:r>
               <a:rPr lang="ko-KR" altLang="en-US" dirty="0"/>
@@ -452,7 +452,7 @@
             </a:r>
             <a:r>
               <a:rPr lang="ko-KR" altLang="en-US" dirty="0"/>
-              <a:t>심의 파트너를 만드는 것을 목표로 하고 있습니다</a:t>
+              <a:t>검증 파트너를 만드는 것을 목표로 하고 있습니다</a:t>
             </a:r>
             <a:r>
               <a:rPr lang="en-US" altLang="ko-KR" dirty="0"/>
@@ -538,7 +538,7 @@
             </a:r>
             <a:r>
               <a:rPr lang="ko-KR" altLang="en-US" dirty="0" err="1"/>
-              <a:t>마케터분들과</a:t>
+              <a:t>구매담당자분들과</a:t>
             </a:r>
             <a:r>
               <a:rPr lang="ko-KR" altLang="en-US" dirty="0"/>
@@ -546,7 +546,7 @@
             </a:r>
             <a:r>
               <a:rPr lang="en-US" altLang="ko-KR" dirty="0"/>
-              <a:t>RA </a:t>
+              <a:t>QA </a:t>
             </a:r>
             <a:r>
               <a:rPr lang="ko-KR" altLang="en-US" dirty="0"/>
@@ -563,7 +563,7 @@
           <a:p>
             <a:r>
               <a:rPr lang="ko-KR" altLang="en-US" dirty="0"/>
-              <a:t>화면 왼쪽에는 올리신 광고 시안이나 상세페이지 원본이 그대로 보여지고</a:t>
+              <a:t>화면 왼쪽에는 올리신 구매계약 계약·도서이나 기술시방서 원본이 그대로 보여지고</a:t>
             </a:r>
             <a:r>
               <a:rPr lang="en-US" altLang="ko-KR" dirty="0"/>
@@ -597,7 +597,7 @@
             </a:r>
             <a:r>
               <a:rPr lang="ko-KR" altLang="en-US" dirty="0"/>
-              <a:t>위반된 법 조항과 함께 개선할 추천 문구까지 보여줍니다</a:t>
+              <a:t>위반된 법 조항과 함께 개선할 추천 조항까지 보여줍니다</a:t>
             </a:r>
             <a:r>
               <a:rPr lang="en-US" altLang="ko-KR" dirty="0"/>
@@ -610,7 +610,7 @@
           <a:p>
             <a:r>
               <a:rPr lang="ko-KR" altLang="en-US" dirty="0"/>
-              <a:t>특히 왼쪽 시안에서 문장을 클릭하면</a:t>
+              <a:t>특히 왼쪽 계약·도서에서 문장을 클릭하면</a:t>
             </a:r>
             <a:r>
               <a:rPr lang="en-US" altLang="ko-KR" dirty="0"/>
@@ -634,7 +634,7 @@
             </a:r>
             <a:r>
               <a:rPr lang="ko-KR" altLang="en-US" dirty="0"/>
-              <a:t>수십 장짜리 상세페이지도 스크롤로 헤매지 않고 클릭 몇 번으로 바로바로 검토하고 수정하실 수 있도록 개발하겠습니다</a:t>
+              <a:t>수십 장짜리 기술시방서도 스크롤로 헤매지 않고 클릭 몇 번으로 바로바로 검토하고 수정하실 수 있도록 개발하겠습니다</a:t>
             </a:r>
             <a:r>
               <a:rPr lang="en-US" altLang="ko-KR" dirty="0"/>
@@ -768,11 +768,11 @@
             </a:r>
             <a:r>
               <a:rPr lang="ko-KR" altLang="en-US" dirty="0"/>
-              <a:t>마케팅 결재 시스템인 </a:t>
+              <a:t>구매조달 결재 시스템인 </a:t>
             </a:r>
             <a:r>
               <a:rPr lang="ko-KR" altLang="en-US" dirty="0" err="1"/>
-              <a:t>마케팅허브</a:t>
+              <a:t>전자구매포털</a:t>
             </a:r>
             <a:r>
               <a:rPr lang="en-US" altLang="ko-KR" dirty="0"/>
@@ -780,7 +780,7 @@
             </a:r>
             <a:r>
               <a:rPr lang="en-US" altLang="ko-KR" dirty="0" err="1"/>
-              <a:t>MarketingHub</a:t>
+              <a:t>SRM-Portal</a:t>
             </a:r>
             <a:r>
               <a:rPr lang="en-US" altLang="ko-KR" dirty="0"/>
@@ -796,7 +796,7 @@
             </a:r>
             <a:r>
               <a:rPr lang="ko-KR" altLang="en-US" dirty="0"/>
-              <a:t>심의 결과서와 </a:t>
+              <a:t>검증 결과서와 </a:t>
             </a:r>
             <a:r>
               <a:rPr lang="en-US" altLang="ko-KR" dirty="0"/>
@@ -822,7 +822,7 @@
             </a:r>
             <a:r>
               <a:rPr lang="ko-KR" altLang="en-US" dirty="0"/>
-              <a:t>레몬 시스템에서 최신 원료 규제와 배합 금지 성분 데이터를 자동으로 가져와 동기화합니다</a:t>
+              <a:t>HB-Monitor 시스템에서 최신 원소재 규제와 조성 금지 성분 데이터를 자동으로 가져와 동기화합니다</a:t>
             </a:r>
             <a:r>
               <a:rPr lang="en-US" altLang="ko-KR" dirty="0"/>
@@ -844,7 +844,7 @@
             </a:r>
             <a:r>
               <a:rPr lang="en-US" altLang="ko-KR" dirty="0" err="1"/>
-              <a:t>ProductLab</a:t>
+              <a:t>PLM-Nexus</a:t>
             </a:r>
             <a:r>
               <a:rPr lang="ko-KR" altLang="en-US" dirty="0"/>
@@ -852,7 +852,7 @@
             </a:r>
             <a:r>
               <a:rPr lang="ko-KR" altLang="en-US" dirty="0" err="1"/>
-              <a:t>세포효능</a:t>
+              <a:t>배상한도성능규격</a:t>
             </a:r>
             <a:r>
               <a:rPr lang="ko-KR" altLang="en-US" dirty="0"/>
@@ -864,7 +864,7 @@
             </a:r>
             <a:r>
               <a:rPr lang="ko-KR" altLang="en-US" dirty="0"/>
-              <a:t> 실증 </a:t>
+              <a:t> 시험검증 </a:t>
             </a:r>
             <a:r>
               <a:rPr lang="en-US" altLang="ko-KR" dirty="0"/>
@@ -1051,11 +1051,11 @@
             </a:r>
             <a:r>
               <a:rPr lang="en-US" altLang="ko-KR" dirty="0" err="1"/>
-              <a:t>ProductLab</a:t>
+              <a:t>PLM-Nexus</a:t>
             </a:r>
             <a:r>
               <a:rPr lang="ko-KR" altLang="en-US" dirty="0"/>
-              <a:t> 실증 </a:t>
+              <a:t> 시험검증 </a:t>
             </a:r>
             <a:r>
               <a:rPr lang="en-US" altLang="ko-KR" dirty="0"/>
@@ -1826,11 +1826,11 @@
             </a:r>
             <a:r>
               <a:rPr lang="en-US" altLang="ko-KR" dirty="0" err="1"/>
-              <a:t>ProductLab</a:t>
+              <a:t>PLM-Nexus</a:t>
             </a:r>
             <a:r>
               <a:rPr lang="ko-KR" altLang="en-US" dirty="0"/>
-              <a:t> 연구 데이터 실증 </a:t>
+              <a:t> 연구 데이터 시험검증 </a:t>
             </a:r>
             <a:r>
               <a:rPr lang="en-US" altLang="ko-KR" dirty="0"/>
@@ -1870,7 +1870,7 @@
             </a:r>
             <a:r>
               <a:rPr lang="ko-KR" altLang="en-US" dirty="0"/>
-              <a:t>월 말까지 실증 데이터가 갖춰지면</a:t>
+              <a:t>월 말까지 시험검증 데이터가 갖춰지면</a:t>
             </a:r>
             <a:r>
               <a:rPr lang="en-US" altLang="ko-KR" dirty="0"/>
@@ -2254,7 +2254,7 @@
             </a:r>
             <a:r>
               <a:rPr lang="ko-KR" altLang="en-US" dirty="0"/>
-              <a:t>실제 한빛글로벌의 과거 심의 사례 중에서 엄선한 정답 시험지인 </a:t>
+              <a:t>실제 한빛글로벌의 과거 검증 사례 중에서 엄선한 정답 시험지인 </a:t>
             </a:r>
             <a:r>
               <a:rPr lang="en-US" altLang="ko-KR" dirty="0"/>
@@ -2363,7 +2363,7 @@
           <a:p>
             <a:r>
               <a:rPr lang="ko-KR" altLang="en-US" dirty="0"/>
-              <a:t>특히 표시·광고 공정화법 위반을 놓치지 않도록 </a:t>
+              <a:t>특히 하도급거래 공정화법 위반을 놓치지 않도록 </a:t>
             </a:r>
             <a:r>
               <a:rPr lang="en-US" altLang="ko-KR" dirty="0"/>
@@ -2534,7 +2534,7 @@
             </a:r>
             <a:r>
               <a:rPr lang="ko-KR" altLang="en-US" dirty="0" err="1"/>
-              <a:t>식약처</a:t>
+              <a:t>공정위·표준원</a:t>
             </a:r>
             <a:r>
               <a:rPr lang="ko-KR" altLang="en-US" dirty="0"/>
@@ -2616,7 +2616,7 @@
             </a:r>
             <a:r>
               <a:rPr lang="ko-KR" altLang="en-US" dirty="0"/>
-              <a:t>아직 세상에 안 나온 신제품 시안이 </a:t>
+              <a:t>아직 세상에 안 나온 신제품 계약·도서이 </a:t>
             </a:r>
             <a:r>
               <a:rPr lang="en-US" altLang="ko-KR" dirty="0"/>
@@ -2785,7 +2785,7 @@
             </a:r>
             <a:r>
               <a:rPr lang="ko-KR" altLang="en-US" dirty="0"/>
-              <a:t> 신제품 광고 시안이 외부 상용 </a:t>
+              <a:t> 신제품 구매계약 계약·도서이 외부 상용 </a:t>
             </a:r>
             <a:r>
               <a:rPr lang="en-US" altLang="ko-KR" dirty="0"/>
@@ -3063,7 +3063,7 @@
             </a:r>
             <a:r>
               <a:rPr lang="ko-KR" altLang="en-US" dirty="0"/>
-              <a:t>가 어떻게 안전하게 심의하는지 동작 방식을 </a:t>
+              <a:t>가 어떻게 안전하게 검증하는지 동작 방식을 </a:t>
             </a:r>
             <a:r>
               <a:rPr lang="ko-KR" altLang="en-US" dirty="0" err="1"/>
@@ -3078,7 +3078,7 @@
             </a:br>
             <a:r>
               <a:rPr lang="en-US" altLang="ko-KR" dirty="0" err="1"/>
-              <a:t>ProductLab</a:t>
+              <a:t>PLM-Nexus</a:t>
             </a:r>
             <a:r>
               <a:rPr lang="ko-KR" altLang="en-US" dirty="0"/>
@@ -3287,7 +3287,7 @@
             </a:r>
             <a:r>
               <a:rPr lang="ko-KR" altLang="en-US" dirty="0"/>
-              <a:t>심의 노하우를 알려주실 현업 담당자 지정이 필요합니다</a:t>
+              <a:t>검증 노하우를 알려주실 현업 담당자 지정이 필요합니다</a:t>
             </a:r>
             <a:r>
               <a:rPr lang="en-US" altLang="ko-KR" dirty="0"/>
@@ -3317,7 +3317,7 @@
             </a:r>
             <a:r>
               <a:rPr lang="ko-KR" altLang="en-US" dirty="0"/>
-              <a:t>년간의 광고 심의 사례 약 </a:t>
+              <a:t>년간의 계약·규격 검증 사례 약 </a:t>
             </a:r>
             <a:r>
               <a:rPr lang="en-US" altLang="ko-KR" dirty="0"/>
@@ -3343,7 +3343,7 @@
             </a:r>
             <a:r>
               <a:rPr lang="ko-KR" altLang="en-US" dirty="0" err="1"/>
-              <a:t>마케팅허브</a:t>
+              <a:t>전자구매포털</a:t>
             </a:r>
             <a:r>
               <a:rPr lang="en-US" altLang="ko-KR" dirty="0"/>
@@ -3351,7 +3351,7 @@
             </a:r>
             <a:r>
               <a:rPr lang="ko-KR" altLang="en-US" dirty="0"/>
-              <a:t>레몬</a:t>
+              <a:t>HB-Monitor</a:t>
             </a:r>
             <a:r>
               <a:rPr lang="en-US" altLang="ko-KR" dirty="0"/>
@@ -3359,7 +3359,7 @@
             </a:r>
             <a:r>
               <a:rPr lang="en-US" altLang="ko-KR" dirty="0" err="1"/>
-              <a:t>ProductLab</a:t>
+              <a:t>PLM-Nexus</a:t>
             </a:r>
             <a:r>
               <a:rPr lang="ko-KR" altLang="en-US" dirty="0"/>
@@ -3578,7 +3578,7 @@
             </a:r>
             <a:r>
               <a:rPr lang="en-US" altLang="ko-KR" dirty="0" err="1"/>
-              <a:t>SyncGuard</a:t>
+              <a:t>SyncFlow</a:t>
             </a:r>
             <a:r>
               <a:rPr lang="en-US" altLang="ko-KR" dirty="0"/>
@@ -3682,7 +3682,7 @@
             </a:r>
             <a:r>
               <a:rPr lang="ko-KR" altLang="en-US" dirty="0"/>
-              <a:t> 화장품 광고 규제는 날로 엄격해지고 마케팅 채널과 콘텐츠는 폭발적으로 늘고 있습니다</a:t>
+              <a:t> 전장부품 구매계약 규제는 날로 엄격해지고 구매조달 채널과 콘텐츠는 폭발적으로 늘고 있습니다</a:t>
             </a:r>
             <a:r>
               <a:rPr lang="en-US" altLang="ko-KR" dirty="0"/>
@@ -3703,7 +3703,7 @@
           <a:p>
             <a:r>
               <a:rPr lang="ko-KR" altLang="en-US" dirty="0"/>
-              <a:t>그래서 법률 조항과 실증자료를 찾아 대조하는 </a:t>
+              <a:t>그래서 법률 조항과 시험성적서를 찾아 대조하는 </a:t>
             </a:r>
             <a:r>
               <a:rPr lang="en-US" altLang="ko-KR" dirty="0"/>
@@ -3719,7 +3719,7 @@
             </a:r>
             <a:r>
               <a:rPr lang="ko-KR" altLang="en-US" dirty="0"/>
-              <a:t>법적 리스크를 사전에 판단하고 심의 시간도 대폭 줄이는 것을 목표로 하고 있습니다</a:t>
+              <a:t>법적 리스크를 사전에 판단하고 검증 시간도 대폭 줄이는 것을 목표로 하고 있습니다</a:t>
             </a:r>
             <a:r>
               <a:rPr lang="en-US" altLang="ko-KR" dirty="0"/>
@@ -3814,11 +3814,11 @@
           <a:p>
             <a:r>
               <a:rPr lang="ko-KR" altLang="en-US" dirty="0"/>
-              <a:t>현재는 마케터가 시안을 올리면 </a:t>
+              <a:t>현재는 구매담당자가 계약·도서을 올리면 </a:t>
             </a:r>
             <a:r>
               <a:rPr lang="en-US" altLang="ko-KR" dirty="0"/>
-              <a:t>RA </a:t>
+              <a:t>QA </a:t>
             </a:r>
             <a:r>
               <a:rPr lang="ko-KR" altLang="en-US" dirty="0"/>
@@ -3833,7 +3833,7 @@
             </a:br>
             <a:r>
               <a:rPr lang="ko-KR" altLang="en-US" dirty="0"/>
-              <a:t>그러다 보니 마케팅 일정이 촉박해지기도 하고</a:t>
+              <a:t>그러다 보니 구매조달 일정이 촉박해지기도 하고</a:t>
             </a:r>
             <a:r>
               <a:rPr lang="en-US" altLang="ko-KR" dirty="0"/>
@@ -3845,7 +3845,7 @@
             </a:r>
             <a:r>
               <a:rPr lang="ko-KR" altLang="en-US" dirty="0" err="1"/>
-              <a:t>미실증</a:t>
+              <a:t>미시험검증</a:t>
             </a:r>
             <a:r>
               <a:rPr lang="ko-KR" altLang="en-US" dirty="0"/>
@@ -3853,11 +3853,11 @@
             </a:r>
             <a:r>
               <a:rPr lang="ko-KR" altLang="en-US" dirty="0" err="1"/>
-              <a:t>식약처</a:t>
+              <a:t>공정위·표준원</a:t>
             </a:r>
             <a:r>
               <a:rPr lang="ko-KR" altLang="en-US" dirty="0"/>
-              <a:t> 시정명령이나 과징금을 받게 되면 브랜드에도 타격을 </a:t>
+              <a:t> 시정명령이나 과징금을 받게 되면 사업본부에도 타격을 </a:t>
             </a:r>
             <a:r>
               <a:rPr lang="ko-KR" altLang="en-US" dirty="0" err="1"/>
@@ -3894,7 +3894,7 @@
             </a:r>
             <a:r>
               <a:rPr lang="ko-KR" altLang="en-US" dirty="0"/>
-              <a:t>시안을 올리자마자 수분 안에 </a:t>
+              <a:t>계약·도서을 올리자마자 몇 분 안에 </a:t>
             </a:r>
             <a:r>
               <a:rPr lang="en-US" altLang="ko-KR" dirty="0"/>
@@ -3906,7 +3906,7 @@
             </a:r>
             <a:r>
               <a:rPr lang="ko-KR" altLang="en-US" dirty="0" err="1"/>
-              <a:t>금지어나</a:t>
+              <a:t>독소조항나</a:t>
             </a:r>
             <a:r>
               <a:rPr lang="ko-KR" altLang="en-US" dirty="0"/>
@@ -3943,7 +3943,7 @@
             </a:r>
             <a:r>
               <a:rPr lang="ko-KR" altLang="en-US" dirty="0" err="1"/>
-              <a:t>식약처</a:t>
+              <a:t>공정위·표준원</a:t>
             </a:r>
             <a:r>
               <a:rPr lang="ko-KR" altLang="en-US" dirty="0"/>
@@ -3951,11 +3951,11 @@
             </a:r>
             <a:r>
               <a:rPr lang="en-US" altLang="ko-KR" dirty="0" err="1"/>
-              <a:t>ProductLab</a:t>
+              <a:t>PLM-Nexus</a:t>
             </a:r>
             <a:r>
               <a:rPr lang="ko-KR" altLang="en-US" dirty="0"/>
-              <a:t>에 있는 실증 데이터에 대한 대조를 통해서</a:t>
+              <a:t>에 있는 시험검증 데이터에 대한 대조를 통해서</a:t>
             </a:r>
             <a:r>
               <a:rPr lang="en-US" altLang="ko-KR" dirty="0"/>
@@ -3963,7 +3963,7 @@
             </a:r>
             <a:r>
               <a:rPr lang="ko-KR" altLang="en-US" dirty="0"/>
-              <a:t>법적 리스크를 최소화 하고 그동안 쌓인 심의 노하우도 회사의 자산으로 남길수 있습니다</a:t>
+              <a:t>법적 리스크를 최소화 하고 그동안 쌓인 검증 노하우도 회사의 자산으로 남길수 있습니다</a:t>
             </a:r>
             <a:r>
               <a:rPr lang="en-US" altLang="ko-KR" dirty="0"/>
@@ -4087,7 +4087,7 @@
             </a:r>
             <a:r>
               <a:rPr lang="ko-KR" altLang="en-US" dirty="0"/>
-              <a:t>실증자료 </a:t>
+              <a:t>시험성적서 </a:t>
             </a:r>
             <a:r>
               <a:rPr lang="en-US" altLang="ko-KR" dirty="0"/>
@@ -4103,15 +4103,15 @@
             </a:r>
             <a:r>
               <a:rPr lang="en-US" altLang="ko-KR" dirty="0" err="1"/>
-              <a:t>ProductLab</a:t>
+              <a:t>PLM-Nexus</a:t>
             </a:r>
             <a:r>
               <a:rPr lang="ko-KR" altLang="en-US" dirty="0"/>
-              <a:t>에 있는 원료 </a:t>
+              <a:t>에 있는 원소재 </a:t>
             </a:r>
             <a:r>
               <a:rPr lang="ko-KR" altLang="en-US" dirty="0" err="1"/>
-              <a:t>세포효능이나</a:t>
+              <a:t>배상한도성능규격이나</a:t>
             </a:r>
             <a:r>
               <a:rPr lang="ko-KR" altLang="en-US" dirty="0"/>
@@ -4136,7 +4136,7 @@
           <a:p>
             <a:r>
               <a:rPr lang="ko-KR" altLang="en-US" dirty="0"/>
-              <a:t>시안을 올리면 글자와 위치를 뽑아내는 텍스트 추출</a:t>
+              <a:t>계약·도서을 올리면 글자와 위치를 뽑아내는 텍스트 추출</a:t>
             </a:r>
             <a:r>
               <a:rPr lang="en-US" altLang="ko-KR" dirty="0"/>
@@ -4170,7 +4170,7 @@
           <a:p>
             <a:r>
               <a:rPr lang="ko-KR" altLang="en-US" dirty="0"/>
-              <a:t>그리고 원본 시안과 판정 결과를 한눈에 비교해 볼 수 있는 </a:t>
+              <a:t>그리고 원본 계약·도서과 판정 결과를 한눈에 비교해 볼 수 있는 </a:t>
             </a:r>
             <a:r>
               <a:rPr lang="en-US" altLang="ko-KR" dirty="0"/>
@@ -4178,7 +4178,7 @@
             </a:r>
             <a:r>
               <a:rPr lang="ko-KR" altLang="en-US" dirty="0"/>
-              <a:t>시안 대조 뷰어</a:t>
+              <a:t>계약·도서 대조 뷰어</a:t>
             </a:r>
             <a:r>
               <a:rPr lang="en-US" altLang="ko-KR" dirty="0"/>
@@ -4202,7 +4202,7 @@
             </a:r>
             <a:r>
               <a:rPr lang="ko-KR" altLang="en-US" dirty="0"/>
-              <a:t>마지막으로 심의 결과서에 대한 </a:t>
+              <a:t>마지막으로 검증 결과서에 대한 </a:t>
             </a:r>
             <a:r>
               <a:rPr lang="en-US" altLang="ko-KR" dirty="0"/>
@@ -4247,7 +4247,7 @@
             </a:r>
             <a:r>
               <a:rPr lang="ko-KR" altLang="en-US" dirty="0"/>
-              <a:t>실제 업무가 물 흐르듯 돌아가는 완결된 심의 시스템을 완성하겠습니다</a:t>
+              <a:t>실제 업무가 물 흐르듯 돌아가는 완결된 검증 시스템을 완성하겠습니다</a:t>
             </a:r>
             <a:r>
               <a:rPr lang="en-US" altLang="ko-KR" dirty="0"/>
@@ -4366,11 +4366,11 @@
             </a:r>
             <a:r>
               <a:rPr lang="ko-KR" altLang="en-US" dirty="0" err="1"/>
-              <a:t>식약처</a:t>
+              <a:t>공정위·표준원</a:t>
             </a:r>
             <a:r>
               <a:rPr lang="ko-KR" altLang="en-US" dirty="0"/>
-              <a:t> 표시·광고 공정화법</a:t>
+              <a:t> 하도급거래 공정화법</a:t>
             </a:r>
             <a:r>
               <a:rPr lang="en-US" altLang="ko-KR" dirty="0"/>
@@ -4378,11 +4378,11 @@
             </a:r>
             <a:r>
               <a:rPr lang="en-US" altLang="ko-KR" dirty="0" err="1"/>
-              <a:t>ProductLab</a:t>
+              <a:t>PLM-Nexus</a:t>
             </a:r>
             <a:r>
               <a:rPr lang="ko-KR" altLang="en-US" dirty="0"/>
-              <a:t> 실증 </a:t>
+              <a:t> 시험검증 </a:t>
             </a:r>
             <a:r>
               <a:rPr lang="en-US" altLang="ko-KR" dirty="0"/>
@@ -4423,11 +4423,11 @@
             </a:r>
             <a:r>
               <a:rPr lang="ko-KR" altLang="en-US" dirty="0" err="1"/>
-              <a:t>딥페이크</a:t>
+              <a:t>3D모델링</a:t>
             </a:r>
             <a:r>
               <a:rPr lang="ko-KR" altLang="en-US" dirty="0"/>
-              <a:t> 분석이나 외국 법률 심의</a:t>
+              <a:t> 분석이나 외국 법률 검증</a:t>
             </a:r>
             <a:r>
               <a:rPr lang="en-US" altLang="ko-KR" dirty="0"/>
@@ -4499,7 +4499,7 @@
             </a:r>
             <a:r>
               <a:rPr lang="en-US" altLang="ko-KR" dirty="0" err="1"/>
-              <a:t>ProductLab</a:t>
+              <a:t>PLM-Nexus</a:t>
             </a:r>
             <a:r>
               <a:rPr lang="ko-KR" altLang="en-US" dirty="0"/>
@@ -4521,7 +4521,7 @@
           <a:p>
             <a:r>
               <a:rPr lang="ko-KR" altLang="en-US" dirty="0"/>
-              <a:t>신제품 시안이 </a:t>
+              <a:t>신제품 계약·도서이 </a:t>
             </a:r>
             <a:r>
               <a:rPr lang="en-US" altLang="ko-KR" dirty="0"/>
@@ -4863,7 +4863,7 @@
             </a:r>
             <a:r>
               <a:rPr lang="en-US" altLang="ko-KR" dirty="0" err="1"/>
-              <a:t>ProductLab</a:t>
+              <a:t>PLM-Nexus</a:t>
             </a:r>
             <a:r>
               <a:rPr lang="ko-KR" altLang="en-US" dirty="0"/>
@@ -4871,7 +4871,7 @@
             </a:r>
             <a:r>
               <a:rPr lang="en-US" altLang="ko-KR" dirty="0" err="1"/>
-              <a:t>MarketingHub</a:t>
+              <a:t>SRM-Portal</a:t>
             </a:r>
             <a:r>
               <a:rPr lang="ko-KR" altLang="en-US" dirty="0"/>
@@ -5031,7 +5031,7 @@
             </a:r>
             <a:r>
               <a:rPr lang="ko-KR" altLang="en-US" dirty="0"/>
-              <a:t>시안과 판정 결과를 한 화면에서 비교할 수 있게 만들겠습니다</a:t>
+              <a:t>계약·도서과 판정 결과를 한 화면에서 비교할 수 있게 만들겠습니다</a:t>
             </a:r>
             <a:r>
               <a:rPr lang="en-US" altLang="ko-KR" dirty="0"/>
@@ -5162,7 +5162,7 @@
             </a:r>
             <a:r>
               <a:rPr lang="ko-KR" altLang="en-US" dirty="0" err="1"/>
-              <a:t>마케팅허브</a:t>
+              <a:t>전자구매포털</a:t>
             </a:r>
             <a:r>
               <a:rPr lang="en-US" altLang="ko-KR" dirty="0"/>
@@ -5170,7 +5170,7 @@
             </a:r>
             <a:r>
               <a:rPr lang="ko-KR" altLang="en-US" dirty="0"/>
-              <a:t>레몬 성분 사전</a:t>
+              <a:t>HB-Monitor 성분 사전</a:t>
             </a:r>
             <a:r>
               <a:rPr lang="en-US" altLang="ko-KR" dirty="0"/>
@@ -5182,11 +5182,11 @@
             </a:r>
             <a:r>
               <a:rPr lang="en-US" altLang="ko-KR" dirty="0" err="1"/>
-              <a:t>ProductLab</a:t>
+              <a:t>PLM-Nexus</a:t>
             </a:r>
             <a:r>
               <a:rPr lang="ko-KR" altLang="en-US" dirty="0"/>
-              <a:t> 실증 데이터까지 연결하게 됩니다</a:t>
+              <a:t> 시험검증 데이터까지 연결하게 됩니다</a:t>
             </a:r>
             <a:r>
               <a:rPr lang="en-US" altLang="ko-KR" dirty="0"/>
@@ -5342,7 +5342,7 @@
             </a:r>
             <a:r>
               <a:rPr lang="ko-KR" altLang="en-US" dirty="0" err="1"/>
-              <a:t>금지어</a:t>
+              <a:t>독소조항</a:t>
             </a:r>
             <a:r>
               <a:rPr lang="ko-KR" altLang="en-US" dirty="0"/>
@@ -5364,7 +5364,7 @@
             </a:r>
             <a:r>
               <a:rPr lang="ko-KR" altLang="en-US" dirty="0" err="1"/>
-              <a:t>식약처</a:t>
+              <a:t>공정위·표준원</a:t>
             </a:r>
             <a:r>
               <a:rPr lang="ko-KR" altLang="en-US" dirty="0"/>
@@ -5372,11 +5372,11 @@
             </a:r>
             <a:r>
               <a:rPr lang="en-US" altLang="ko-KR" dirty="0" err="1"/>
-              <a:t>ProductLab</a:t>
+              <a:t>PLM-Nexus</a:t>
             </a:r>
             <a:r>
               <a:rPr lang="ko-KR" altLang="en-US" dirty="0"/>
-              <a:t> 실증자료에서 </a:t>
+              <a:t> 시험성적서에서 </a:t>
             </a:r>
             <a:r>
               <a:rPr lang="en-US" altLang="ko-KR" dirty="0"/>
@@ -5384,7 +5384,7 @@
             </a:r>
             <a:r>
               <a:rPr lang="ko-KR" altLang="en-US" dirty="0"/>
-              <a:t>관련 법 조항과 실제 효능 근거</a:t>
+              <a:t>관련 법 조항과 실제 성능규격 근거</a:t>
             </a:r>
             <a:r>
               <a:rPr lang="en-US" altLang="ko-KR" dirty="0"/>
@@ -5446,7 +5446,7 @@
             </a:r>
             <a:r>
               <a:rPr lang="ko-KR" altLang="en-US" dirty="0"/>
-              <a:t>판정을 내리고 대안 문구까지 추천해 줍니다</a:t>
+              <a:t>판정을 내리고 대안 조항까지 추천해 줍니다</a:t>
             </a:r>
             <a:r>
               <a:rPr lang="en-US" altLang="ko-KR" dirty="0"/>
@@ -5527,7 +5527,7 @@
             </a:r>
             <a:r>
               <a:rPr lang="ko-KR" altLang="en-US" dirty="0"/>
-              <a:t>명확한 법률 조항이나 실증 데이터 근거가 없으면 판정 자체를 내리지 못하게 막았습니다</a:t>
+              <a:t>명확한 법률 조항이나 시험검증 데이터 근거가 없으면 판정 자체를 내리지 못하게 막았습니다</a:t>
             </a:r>
             <a:r>
               <a:rPr lang="en-US" altLang="ko-KR" dirty="0"/>
@@ -8612,7 +8612,7 @@
                   <a:srgbClr val="FFFFFF"/>
                 </a:solidFill>
               </a:rPr>
-              <a:t>한빛글로벌 SyncGuard AI 시스템 구축</a:t>
+              <a:t>한빛글로벌 SyncFlow AI 시스템 구축</a:t>
             </a:r>
           </a:p>
         </p:txBody>
@@ -8730,7 +8730,7 @@
                   <a:srgbClr val="C8D3E6"/>
                 </a:solidFill>
               </a:rPr>
-              <a:t>화장품</a:t>
+              <a:t>전장부품</a:t>
             </a:r>
             <a:r>
               <a:rPr sz="1500" b="0" dirty="0">
@@ -8746,7 +8746,7 @@
                   <a:srgbClr val="C8D3E6"/>
                 </a:solidFill>
               </a:rPr>
-              <a:t>광고</a:t>
+              <a:t>구매계약</a:t>
             </a:r>
             <a:r>
               <a:rPr sz="1500" b="0" dirty="0">
@@ -8762,7 +8762,7 @@
                   <a:srgbClr val="C8D3E6"/>
                 </a:solidFill>
               </a:rPr>
-              <a:t>시안의</a:t>
+              <a:t>계약·도서의</a:t>
             </a:r>
             <a:r>
               <a:rPr sz="1500" b="0" dirty="0">
@@ -8778,7 +8778,7 @@
                   <a:srgbClr val="C8D3E6"/>
                 </a:solidFill>
               </a:rPr>
-              <a:t>표시·광고</a:t>
+              <a:t>계약·기술규격</a:t>
             </a:r>
             <a:r>
               <a:rPr sz="1500" b="0" dirty="0">
@@ -8882,7 +8882,7 @@
                   <a:srgbClr val="C8D3E6"/>
                 </a:solidFill>
               </a:rPr>
-              <a:t> RA </a:t>
+              <a:t> QA </a:t>
             </a:r>
             <a:r>
               <a:rPr sz="1500" b="0" dirty="0" err="1">
@@ -8906,7 +8906,7 @@
                   <a:srgbClr val="C8D3E6"/>
                 </a:solidFill>
               </a:rPr>
-              <a:t>심의를</a:t>
+              <a:t>검증을</a:t>
             </a:r>
             <a:r>
               <a:rPr sz="1500" b="0" dirty="0">
@@ -9269,7 +9269,7 @@
                   <a:srgbClr val="0F2340"/>
                 </a:solidFill>
               </a:rPr>
-              <a:t>핵심 화면: 시안·판정 결과 대조</a:t>
+              <a:t>핵심 화면: 계약·도서·판정 결과 대조</a:t>
             </a:r>
           </a:p>
         </p:txBody>
@@ -9345,7 +9345,7 @@
                   <a:srgbClr val="6B7280"/>
                 </a:solidFill>
               </a:rPr>
-              <a:t>시안 원본과 문장별 판정 결과를 나란히 놓고, 한쪽을 누르면 다른 쪽에서 같은 위치가 함께 표시됩니다.</a:t>
+              <a:t>계약·도서 원본과 문장별 판정 결과를 나란히 놓고, 한쪽을 누르면 다른 쪽에서 같은 위치가 함께 표시됩니다.</a:t>
             </a:r>
           </a:p>
         </p:txBody>
@@ -9447,7 +9447,7 @@
                   <a:srgbClr val="374151"/>
                 </a:solidFill>
               </a:rPr>
-              <a:t>결과 검토  |  신제품 크림 상세페이지 시안 (12쪽 중 1쪽)</a:t>
+              <a:t>결과 검토  |  구동모터 제어기(MCU) 물품공급계약서 (12쪽 중 1쪽)</a:t>
             </a:r>
           </a:p>
         </p:txBody>
@@ -9485,7 +9485,7 @@
                   <a:srgbClr val="6B7280"/>
                 </a:solidFill>
               </a:rPr>
-              <a:t>화면 예시 · 예시 문구 판정은 RA 검토 후 확정</a:t>
+              <a:t>화면 예시 · 예시 조항 판정은 법무·QA 검토 후 확정</a:t>
             </a:r>
           </a:p>
         </p:txBody>
@@ -9605,7 +9605,7 @@
                   <a:srgbClr val="111827"/>
                 </a:solidFill>
               </a:rPr>
-              <a:t>피부 깊은 진피층까지 도달해 손상 조직 복원</a:t>
+              <a:t>납품 지연 시 사유 불문 일일 3% 지체상금 및 무한 간접손해 배상</a:t>
             </a:r>
           </a:p>
         </p:txBody>
@@ -9693,7 +9693,7 @@
                   <a:srgbClr val="111827"/>
                 </a:solidFill>
               </a:rPr>
-              <a:t>72시간 보습 지속</a:t>
+              <a:t>2,000시간 내열·진동 보증</a:t>
             </a:r>
           </a:p>
         </p:txBody>
@@ -9781,7 +9781,7 @@
                   <a:srgbClr val="111827"/>
                 </a:solidFill>
               </a:rPr>
-              <a:t>촉촉하고 매끄러운 피부 결로 가꿔 줍니다</a:t>
+              <a:t>ISO 26262 기능안전 ASIL-D 및 AEC-Q100 Grade 1 규격을 충족합니다</a:t>
             </a:r>
           </a:p>
         </p:txBody>
@@ -10443,7 +10443,7 @@
                   <a:srgbClr val="111827"/>
                 </a:solidFill>
               </a:rPr>
-              <a:t>피부 깊은 진피층까지 도달해 손상 조직 복원</a:t>
+              <a:t>납품 지연 시 사유 불문 일일 3% 지체상금 및 무한 간접손해 배상</a:t>
             </a:r>
           </a:p>
         </p:txBody>
@@ -10496,7 +10496,7 @@
                   <a:srgbClr val="374151"/>
                 </a:solidFill>
               </a:rPr>
-              <a:t>의약품 오인 표현, 신체 부위 표현</a:t>
+              <a:t>불공정 독소조항 표현, 부당 원가전가 표현</a:t>
             </a:r>
           </a:p>
           <a:p>
@@ -10519,7 +10519,7 @@
                   <a:srgbClr val="374151"/>
                 </a:solidFill>
               </a:rPr>
-              <a:t>표시·광고 공정화법 제3조, 같은 법 시행규칙 [별표 5] 표시·광고 준수사항</a:t>
+              <a:t>하도급법 제3조의4, 같은 법 시행규칙 [별표 5] 계약·기술규격 준수사항</a:t>
             </a:r>
           </a:p>
         </p:txBody>
@@ -10603,7 +10603,7 @@
                   <a:srgbClr val="374151"/>
                 </a:solidFill>
               </a:rPr>
-              <a:t>피부를 촉촉하고 탄력 있게 가꿔 줍니다</a:t>
+              <a:t>KS R ISO 16750-4 열충격 시험 기준을 완벽히 준수합니다</a:t>
             </a:r>
           </a:p>
         </p:txBody>
@@ -10696,7 +10696,7 @@
                   <a:srgbClr val="374151"/>
                 </a:solidFill>
               </a:rPr>
-              <a:t>매끄럽고 생기 있는 피부 결로 가꿔 줍니다</a:t>
+              <a:t>IATF 16949 품질경영시스템 인증 기준에 따라 양산 공급합니다</a:t>
             </a:r>
           </a:p>
         </p:txBody>
@@ -10786,7 +10786,7 @@
                   <a:srgbClr val="92400E"/>
                 </a:solidFill>
               </a:rPr>
-              <a:t>RA 판정  </a:t>
+              <a:t>법무·QA 판정  </a:t>
             </a:r>
             <a:r>
               <a:rPr sz="950" b="0">
@@ -10947,7 +10947,7 @@
                   <a:srgbClr val="4B5563"/>
                 </a:solidFill>
               </a:rPr>
-              <a:t>72시간 보습 지속 · 실증자료 필요</a:t>
+              <a:t>2,000시간 내열·진동 보증 · 시험성적서 필요</a:t>
             </a:r>
           </a:p>
         </p:txBody>
@@ -11100,7 +11100,7 @@
                   <a:srgbClr val="4B5563"/>
                 </a:solidFill>
               </a:rPr>
-              <a:t>촉촉하고 매끄러운 피부 결로 가꿔 줍니다</a:t>
+              <a:t>ISO 26262 기능안전 ASIL-D 및 AEC-Q100 Grade 1 규격을 충족합니다</a:t>
             </a:r>
           </a:p>
         </p:txBody>
@@ -11215,7 +11215,7 @@
                   <a:srgbClr val="FFFFFF"/>
                 </a:solidFill>
               </a:rPr>
-              <a:t>심의 확정</a:t>
+              <a:t>검증 확정</a:t>
             </a:r>
           </a:p>
         </p:txBody>
@@ -11275,7 +11275,7 @@
                   <a:srgbClr val="4B5563"/>
                 </a:solidFill>
               </a:rPr>
-              <a:t>시안 박스와 문장 카드가 서로 같은 위치를 표시</a:t>
+              <a:t>계약·도서 박스와 문장 카드가 서로 같은 위치를 표시</a:t>
             </a:r>
           </a:p>
         </p:txBody>
@@ -11463,7 +11463,7 @@
                   <a:srgbClr val="6B7280"/>
                 </a:solidFill>
               </a:rPr>
-              <a:t>한빛글로벌 SyncGuard AI 시스템 구축 착수보고서</a:t>
+              <a:t>한빛글로벌 SyncFlow AI 시스템 구축 착수보고서</a:t>
             </a:r>
           </a:p>
         </p:txBody>
@@ -11678,7 +11678,7 @@
                   <a:srgbClr val="6B7280"/>
                 </a:solidFill>
               </a:rPr>
-              <a:t>연계 범위는 로그인(SSO), 심의 의뢰·결과 회신(MarketingHub), 전성분·실증자료(ProductLab), [Option] KT 레몬이며, 10~11월에 확정합니다.</a:t>
+              <a:t>연계 범위는 로그인(SSO), 검증 요청·결과 회신(SRM-Portal), 자재BOM·시험성적서(PLM-Nexus), [Option] HB-Monitor이며, 10~11월에 확정합니다.</a:t>
             </a:r>
           </a:p>
         </p:txBody>
@@ -11721,7 +11721,7 @@
                   <a:srgbClr val="FFFFFF"/>
                 </a:solidFill>
               </a:rPr>
-              <a:t>SyncGuard AI</a:t>
+              <a:t>SyncFlow AI</a:t>
             </a:r>
           </a:p>
         </p:txBody>
@@ -11811,7 +11811,7 @@
                   <a:srgbClr val="92400E"/>
                 </a:solidFill>
               </a:rPr>
-              <a:t>MarketingHub</a:t>
+              <a:t>SRM-Portal</a:t>
             </a:r>
           </a:p>
         </p:txBody>
@@ -11856,7 +11856,7 @@
                   <a:srgbClr val="92400E"/>
                 </a:solidFill>
               </a:rPr>
-              <a:t>KT 레몬</a:t>
+              <a:t>HB-Monitor</a:t>
             </a:r>
           </a:p>
         </p:txBody>
@@ -11901,7 +11901,7 @@
                   <a:srgbClr val="92400E"/>
                 </a:solidFill>
               </a:rPr>
-              <a:t>ProductLab</a:t>
+              <a:t>PLM-Nexus</a:t>
             </a:r>
           </a:p>
         </p:txBody>
@@ -12022,7 +12022,7 @@
                   <a:srgbClr val="6B7280"/>
                 </a:solidFill>
               </a:rPr>
-              <a:t>시안·동영상 의뢰 접수 및 결과(HTML/JSON) 전달</a:t>
+              <a:t>계약·도서·설계도면 의뢰 접수 및 결과(HTML/JSON) 전달</a:t>
             </a:r>
           </a:p>
         </p:txBody>
@@ -12142,7 +12142,7 @@
                   <a:srgbClr val="6B7280"/>
                 </a:solidFill>
               </a:rPr>
-              <a:t>전성분·배합한도 및 세포효능·기술원 실증자료</a:t>
+              <a:t>자재BOM·유해물질한도 및 배상한도성능규격·기술원 시험성적서</a:t>
             </a:r>
           </a:p>
         </p:txBody>
@@ -12730,7 +12730,7 @@
                           </a:solidFill>
                           <a:latin typeface="Malgun Gothic"/>
                         </a:rPr>
-                        <a:t>MarketingHub</a:t>
+                        <a:t>SRM-Portal</a:t>
                       </a:r>
                     </a:p>
                   </a:txBody>
@@ -12777,7 +12777,7 @@
                           </a:solidFill>
                           <a:latin typeface="Malgun Gothic"/>
                         </a:rPr>
-                        <a:t>심의 의뢰 및 결과 회신</a:t>
+                        <a:t>검증 요청 및 결과 회신</a:t>
                       </a:r>
                     </a:p>
                   </a:txBody>
@@ -12918,7 +12918,7 @@
                           </a:solidFill>
                           <a:latin typeface="Malgun Gothic"/>
                         </a:rPr>
-                        <a:t>MarketingHub에서 심의 의뢰 접수 및 판정 결과(HTML/JSON 등) 인터페이스 전달을 통한 마케팅허브 화면 표출, 관리자 상세 뷰어 연동 (결재 시스템 자체 구축 제외)</a:t>
+                        <a:t>SRM-Portal에서 검증 요청 접수 및 판정 결과(HTML/JSON 등) 인터페이스 전달을 통한 전자구매포털 화면 표출, 관리자 상세 뷰어 연동 (결재 시스템 자체 구축 제외)</a:t>
                       </a:r>
                     </a:p>
                   </a:txBody>
@@ -12972,7 +12972,7 @@
                           </a:solidFill>
                           <a:latin typeface="Malgun Gothic"/>
                         </a:rPr>
-                        <a:t>KT 레몬</a:t>
+                        <a:t>HB-Monitor</a:t>
                       </a:r>
                     </a:p>
                   </a:txBody>
@@ -13160,7 +13160,7 @@
                           </a:solidFill>
                           <a:latin typeface="Malgun Gothic"/>
                         </a:rPr>
-                        <a:t>상용 LLM 직접 파싱 대비 레몬 API 호출 품질/정확도 사전 비교 PoC 후 최종 연계 여부 결정 (현재 분리 검토)</a:t>
+                        <a:t>상용 LLM 직접 파싱 대비 HB-Monitor API 호출 품질/정확도 사전 비교 PoC 후 최종 연계 여부 결정 (현재 분리 검토)</a:t>
                       </a:r>
                     </a:p>
                   </a:txBody>
@@ -13214,7 +13214,7 @@
                           </a:solidFill>
                           <a:latin typeface="Malgun Gothic"/>
                         </a:rPr>
-                        <a:t>ProductLab</a:t>
+                        <a:t>PLM-Nexus</a:t>
                       </a:r>
                     </a:p>
                   </a:txBody>
@@ -13261,7 +13261,7 @@
                           </a:solidFill>
                           <a:latin typeface="Malgun Gothic"/>
                         </a:rPr>
-                        <a:t>전성분·배합한도 및 세포효능·기술원 실증자료</a:t>
+                        <a:t>자재BOM·유해물질한도 및 배상한도성능규격·기술원 시험성적서</a:t>
                       </a:r>
                     </a:p>
                   </a:txBody>
@@ -13402,7 +13402,7 @@
                           </a:solidFill>
                           <a:latin typeface="Malgun Gothic"/>
                         </a:rPr>
-                        <a:t>원료코드별 세포효능 보고서(혼합처리 포함), 기술원 보고서 연결 및 실증 첨부파일 DB 구축 연동 (데이터브릿지 전담)</a:t>
+                        <a:t>원소재코드별 배상한도성능규격 보고서(혼합처리 포함), 기술원 보고서 연결 및 시험검증 첨부파일 DB 구축 연동 (데이터브릿지 전담)</a:t>
                       </a:r>
                     </a:p>
                   </a:txBody>
@@ -13691,7 +13691,7 @@
                   <a:srgbClr val="6B7280"/>
                 </a:solidFill>
               </a:rPr>
-              <a:t>한빛글로벌 SyncGuard AI 시스템 구축 착수보고서</a:t>
+              <a:t>한빛글로벌 SyncFlow AI 시스템 구축 착수보고서</a:t>
             </a:r>
           </a:p>
         </p:txBody>
@@ -15420,7 +15420,7 @@
                   <a:srgbClr val="374151"/>
                 </a:solidFill>
               </a:rPr>
-              <a:t>[06] SSO·MarketingHub·KT레몬 연계 개발</a:t>
+              <a:t>[06] SSO·SRM-Portal·HB-Monitor 연계 개발</a:t>
             </a:r>
           </a:p>
         </p:txBody>
@@ -15556,7 +15556,7 @@
                   <a:srgbClr val="0F2340"/>
                 </a:solidFill>
               </a:rPr>
-              <a:t>실증 DB</a:t>
+              <a:t>시험검증 DB</a:t>
             </a:r>
           </a:p>
         </p:txBody>
@@ -15594,7 +15594,7 @@
                   <a:srgbClr val="374151"/>
                 </a:solidFill>
               </a:rPr>
-              <a:t>[07] ProductLab 실증자료 DB 구축·연동</a:t>
+              <a:t>[07] PLM-Nexus 시험성적서 DB 구축·연동</a:t>
             </a:r>
           </a:p>
         </p:txBody>
@@ -16078,7 +16078,7 @@
                   <a:srgbClr val="374151"/>
                 </a:solidFill>
               </a:rPr>
-              <a:t>[10] 마케터·RA 현업 파일럿</a:t>
+              <a:t>[10] 구매담당자·QA 현업 파일럿</a:t>
             </a:r>
           </a:p>
         </p:txBody>
@@ -16477,7 +16477,7 @@
                   <a:srgbClr val="6B7280"/>
                 </a:solidFill>
               </a:rPr>
-              <a:t> RA</a:t>
+              <a:t> QA</a:t>
             </a:r>
           </a:p>
         </p:txBody>
@@ -17822,7 +17822,7 @@
                 </a:solidFill>
                 <a:latin typeface="Malgun Gothic"/>
               </a:rPr>
-              <a:t>착수 착수보고(10.16)   M1 분석·설계 승인(11.20)   M2 엔진검증·중간보고(1월말)   M3 실증DB 구축(1월말)   M4 구현 완료(3월말)   M5 골든셋(표준화 검토 후 단계적 적용 협의)·파일럿(4월말)   M6 그랜드 오픈(5.31)</a:t>
+              <a:t>착수 착수보고(10.16)   M1 분석·설계 승인(11.20)   M2 엔진검증·중간보고(1월말)   M3 시험검증DB 구축(1월말)   M4 구현 완료(3월말)   M5 골든셋(표준화 검토 후 단계적 적용 협의)·파일럿(4월말)   M6 그랜드 오픈(5.31)</a:t>
             </a:r>
           </a:p>
         </p:txBody>
@@ -17890,7 +17890,7 @@
                   <a:srgbClr val="6B7280"/>
                 </a:solidFill>
               </a:rPr>
-              <a:t>한빛글로벌 SyncGuard AI 시스템 구축 착수보고서</a:t>
+              <a:t>한빛글로벌 SyncFlow AI 시스템 구축 착수보고서</a:t>
             </a:r>
           </a:p>
         </p:txBody>
@@ -19915,7 +19915,7 @@
                   <a:srgbClr val="6B7280"/>
                 </a:solidFill>
               </a:rPr>
-              <a:t>한빛글로벌 SyncGuard AI 시스템 구축 착수보고서</a:t>
+              <a:t>한빛글로벌 SyncFlow AI 시스템 구축 착수보고서</a:t>
             </a:r>
           </a:p>
         </p:txBody>
@@ -20794,7 +20794,7 @@
                   <a:srgbClr val="0F2340"/>
                 </a:solidFill>
               </a:rPr>
-              <a:t>마케팅</a:t>
+              <a:t>구매조달</a:t>
             </a:r>
           </a:p>
           <a:p>
@@ -20812,7 +20812,7 @@
                   <a:srgbClr val="4B5563"/>
                 </a:solidFill>
               </a:rPr>
-              <a:t>시안 제공, 파일럿 참여</a:t>
+              <a:t>계약·도서 제공, 파일럿 참여</a:t>
             </a:r>
           </a:p>
         </p:txBody>
@@ -20903,7 +20903,7 @@
                   <a:srgbClr val="0F2340"/>
                 </a:solidFill>
               </a:rPr>
-              <a:t>화장품 연구소</a:t>
+              <a:t>전장부품 연구소</a:t>
             </a:r>
           </a:p>
           <a:p>
@@ -20921,7 +20921,7 @@
                   <a:srgbClr val="4B5563"/>
                 </a:solidFill>
               </a:rPr>
-              <a:t>성분·실증 자료</a:t>
+              <a:t>성분·시험성적서</a:t>
             </a:r>
           </a:p>
         </p:txBody>
@@ -21009,7 +21009,7 @@
                 </a:solidFill>
                 <a:latin typeface="Malgun Gothic"/>
               </a:rPr>
-              <a:t>RA Lab (최윤아·윤서연·배수빈·송하늘)</a:t>
+              <a:t>품질법무검증팀 (최윤아·윤서연·배수빈·송하늘)</a:t>
             </a:r>
           </a:p>
           <a:p>
@@ -21021,7 +21021,7 @@
                 </a:solidFill>
                 <a:latin typeface="Malgun Gothic"/>
               </a:rPr>
-              <a:t>심의 기준 정의, 골든셋 검증(골든셋 표준화 여부 검토 완료 후 단계적 적용 협의), 주간회의 전원 참여</a:t>
+              <a:t>검증 기준 정의, 골든셋 검증(골든셋 표준화 여부 검토 완료 후 단계적 적용 협의), 주간회의 전원 참여</a:t>
             </a:r>
           </a:p>
         </p:txBody>
@@ -21121,7 +21121,7 @@
                 </a:solidFill>
                 <a:latin typeface="Malgun Gothic"/>
               </a:rPr>
-              <a:t>ProductLab 연계, 사내 SSO(IAM) 승인, 인프라 지원</a:t>
+              <a:t>PLM-Nexus 연계, 사내 SSO(IAM) 승인, 인프라 지원</a:t>
             </a:r>
           </a:p>
         </p:txBody>
@@ -21463,7 +21463,7 @@
                 </a:solidFill>
                 <a:latin typeface="Malgun Gothic"/>
               </a:rPr>
-              <a:t>Side-by-Side 대조 뷰어, 심의 포털, API 연계</a:t>
+              <a:t>Side-by-Side 대조 뷰어, 검증 포털, API 연계</a:t>
             </a:r>
           </a:p>
         </p:txBody>
@@ -21551,7 +21551,7 @@
                 </a:solidFill>
                 <a:latin typeface="Malgun Gothic"/>
               </a:rPr>
-              <a:t>실증 DB 리드 (데이터브릿지 강동현 수석 / 조성민 상무)</a:t>
+              <a:t>시험검증 DB 리드 (데이터브릿지 강동현 수석 / 조성민 상무)</a:t>
             </a:r>
           </a:p>
           <a:p>
@@ -21563,7 +21563,7 @@
                 </a:solidFill>
                 <a:latin typeface="Malgun Gothic"/>
               </a:rPr>
-              <a:t>ProductLab 실증 DB 구축 및 인터페이스 연동</a:t>
+              <a:t>PLM-Nexus 시험검증 DB 구축 및 인터페이스 연동</a:t>
             </a:r>
           </a:p>
         </p:txBody>
@@ -21617,7 +21617,7 @@
                 </a:solidFill>
                 <a:latin typeface="Malgun Gothic"/>
               </a:rPr>
-              <a:t>담당자 지정 및 의사결정, 심의 기준·참조 데이터(50건) 제공, 골든셋 검증(골든셋 표준화 여부 검토 완료 후 단계적 적용 협의), 파일럿 참여, 사내 연계/인프라 지원</a:t>
+              <a:t>담당자 지정 및 의사결정, 검증 기준·참조 데이터(50건) 제공, 골든셋 검증(골든셋 표준화 여부 검토 완료 후 단계적 적용 협의), 파일럿 참여, 사내 연계/인프라 지원</a:t>
             </a:r>
           </a:p>
         </p:txBody>
@@ -21739,7 +21739,7 @@
                   <a:srgbClr val="6B7280"/>
                 </a:solidFill>
               </a:rPr>
-              <a:t>한빛글로벌 SyncGuard AI 시스템 구축 착수보고서</a:t>
+              <a:t>한빛글로벌 SyncFlow AI 시스템 구축 착수보고서</a:t>
             </a:r>
           </a:p>
         </p:txBody>
@@ -24613,7 +24613,7 @@
                           </a:solidFill>
                           <a:latin typeface="Malgun Gothic"/>
                         </a:rPr>
-                        <a:t>Side-by-Side 대조 뷰어, 심의 포털, 결과서 파일 고도화</a:t>
+                        <a:t>Side-by-Side 대조 뷰어, 검증 포털, 결과서 파일 고도화</a:t>
                       </a:r>
                     </a:p>
                   </a:txBody>
@@ -25158,7 +25158,7 @@
                           </a:solidFill>
                           <a:latin typeface="Malgun Gothic"/>
                         </a:rPr>
-                        <a:t>실증 DB 리드 (강동현 수석)</a:t>
+                        <a:t>시험검증 DB 리드 (강동현 수석)</a:t>
                       </a:r>
                     </a:p>
                   </a:txBody>
@@ -25205,7 +25205,7 @@
                           </a:solidFill>
                           <a:latin typeface="Malgun Gothic"/>
                         </a:rPr>
-                        <a:t>ProductLab 원료 세포효능·기술원 보고서 연결 DB 구축</a:t>
+                        <a:t>PLM-Nexus 원소재 배상한도성능규격·기술원 보고서 연결 DB 구축</a:t>
                       </a:r>
                     </a:p>
                   </a:txBody>
@@ -25796,7 +25796,7 @@
                           </a:solidFill>
                           <a:latin typeface="Malgun Gothic"/>
                         </a:rPr>
-                        <a:t>ProductLab 연계 지원, 통합·연계 시험 및 골든셋 검증 지원(골든셋 표준화 여부 검토 완료 후 단계적 적용 협의)</a:t>
+                        <a:t>PLM-Nexus 연계 지원, 통합·연계 시험 및 골든셋 검증 지원(골든셋 표준화 여부 검토 완료 후 단계적 적용 협의)</a:t>
                       </a:r>
                     </a:p>
                   </a:txBody>
@@ -26378,7 +26378,7 @@
                 </a:solidFill>
                 <a:latin typeface="Malgun Gothic"/>
               </a:rPr>
-              <a:t>실증자료 DB 구축은 ㈜데이터브릿지(강동현 수석)가 초반(11~12월)에 집중 투입되어 ProductLab 연구 데이터 연동 기반을 조기 완성합니다.</a:t>
+              <a:t>시험성적서 DB 구축은 ㈜데이터브릿지(강동현 수석)가 초반(11~12월)에 집중 투입되어 PLM-Nexus 연구 데이터 연동 기반을 조기 완성합니다.</a:t>
             </a:r>
           </a:p>
           <a:p>
@@ -26458,7 +26458,7 @@
                   <a:srgbClr val="6B7280"/>
                 </a:solidFill>
               </a:rPr>
-              <a:t>한빛글로벌 SyncGuard AI 시스템 구축 착수보고서</a:t>
+              <a:t>한빛글로벌 SyncFlow AI 시스템 구축 착수보고서</a:t>
             </a:r>
           </a:p>
         </p:txBody>
@@ -27892,7 +27892,7 @@
                           </a:solidFill>
                           <a:latin typeface="Malgun Gothic"/>
                         </a:rPr>
-                        <a:t>사내 SSO(IAM), MarketingHub, ProductLab 연계 규격 및 네트워크 협의</a:t>
+                        <a:t>사내 SSO(IAM), SRM-Portal, PLM-Nexus 연계 규격 및 네트워크 협의</a:t>
                       </a:r>
                     </a:p>
                   </a:txBody>
@@ -28087,7 +28087,7 @@
                           </a:solidFill>
                           <a:latin typeface="Malgun Gothic"/>
                         </a:rPr>
-                        <a:t>발주사 PM/RA 전원(4명), 수행사 핵심진</a:t>
+                        <a:t>발주사 PM/QA 전원(4명), 수행사 핵심진</a:t>
                       </a:r>
                     </a:p>
                   </a:txBody>
@@ -28134,7 +28134,7 @@
                           </a:solidFill>
                           <a:latin typeface="Malgun Gothic"/>
                         </a:rPr>
-                        <a:t>금주 실적, 차주 계획, 심의 기준 및 UI/UX 피드백, 이슈 점검</a:t>
+                        <a:t>금주 실적, 차주 계획, 검증 기준 및 UI/UX 피드백, 이슈 점검</a:t>
                       </a:r>
                     </a:p>
                   </a:txBody>
@@ -28686,7 +28686,7 @@
                   <a:srgbClr val="6B7280"/>
                 </a:solidFill>
               </a:rPr>
-              <a:t>한빛글로벌 SyncGuard AI 시스템 구축 착수보고서</a:t>
+              <a:t>한빛글로벌 SyncFlow AI 시스템 구축 착수보고서</a:t>
             </a:r>
           </a:p>
         </p:txBody>
@@ -28901,7 +28901,7 @@
                   <a:srgbClr val="6B7280"/>
                 </a:solidFill>
               </a:rPr>
-              <a:t>과거 심의 사례로 정답 데이터(골든셋)를 만들고, 판정 기준이 바뀔 때마다 같은 데이터로 다시 측정합니다. (골든셋 표준화 여부 검토 완료 후 단계적 적용 협의)</a:t>
+              <a:t>과거 검증 사례로 정답 데이터(골든셋)를 만들고, 판정 기준이 바뀔 때마다 같은 데이터로 다시 측정합니다. (골든셋 표준화 여부 검토 완료 후 단계적 적용 협의)</a:t>
             </a:r>
           </a:p>
         </p:txBody>
@@ -29230,7 +29230,7 @@
                   <a:srgbClr val="0F2340"/>
                 </a:solidFill>
               </a:rPr>
-              <a:t>RA 판정 일치율</a:t>
+              <a:t>법무·QA 판정 일치율</a:t>
             </a:r>
           </a:p>
         </p:txBody>
@@ -29359,7 +29359,7 @@
                   <a:srgbClr val="4B5563"/>
                 </a:solidFill>
               </a:rPr>
-              <a:t>파일럿 기간 RA 최종 판정과 AI 판정이 같은 비율</a:t>
+              <a:t>파일럿 기간 QA 최종 판정과 AI 판정이 같은 비율</a:t>
             </a:r>
           </a:p>
         </p:txBody>
@@ -29841,7 +29841,7 @@
                   <a:srgbClr val="4B5563"/>
                 </a:solidFill>
               </a:rPr>
-              <a:t>RA가 확정한 판정과 대체 표현을 참고 사례로 추가</a:t>
+              <a:t>QA가 확정한 판정과 대체 표현을 참고 사례로 추가</a:t>
             </a:r>
           </a:p>
         </p:txBody>
@@ -30222,7 +30222,7 @@
                   <a:srgbClr val="6B7280"/>
                 </a:solidFill>
               </a:rPr>
-              <a:t>한빛글로벌 SyncGuard AI 시스템 구축 착수보고서</a:t>
+              <a:t>한빛글로벌 SyncFlow AI 시스템 구축 착수보고서</a:t>
             </a:r>
           </a:p>
         </p:txBody>
@@ -31355,7 +31355,7 @@
                           </a:solidFill>
                           <a:latin typeface="Malgun Gothic"/>
                         </a:rPr>
-                        <a:t>10.20 인프라 연계 미팅 진행, MarketingHub/ProductLab 규격 조기 확정 및 가상 연계기 개발 병행</a:t>
+                        <a:t>10.20 인프라 연계 미팅 진행, SRM-Portal/PLM-Nexus 규격 조기 확정 및 가상 연계기 개발 병행</a:t>
                       </a:r>
                     </a:p>
                   </a:txBody>
@@ -31969,7 +31969,7 @@
                             <a:srgbClr val="374151"/>
                           </a:solidFill>
                         </a:rPr>
-                        <a:t>근거 조항이 확인된 판단만 표시, 규칙 판정 하향 금지, RA 최종 확정</a:t>
+                        <a:t>근거 조항이 확인된 판단만 표시, 규칙 판정 하향 금지, QA 최종 확정</a:t>
                       </a:r>
                     </a:p>
                   </a:txBody>
@@ -32126,7 +32126,7 @@
                             <a:srgbClr val="374151"/>
                           </a:solidFill>
                         </a:rPr>
-                        <a:t>시안 데이터 외부 유출</a:t>
+                        <a:t>계약·도서 데이터 외부 유출</a:t>
                       </a:r>
                     </a:p>
                   </a:txBody>
@@ -32638,7 +32638,7 @@
                             <a:srgbClr val="374151"/>
                           </a:solidFill>
                         </a:rPr>
-                        <a:t> RA, AI </a:t>
+                        <a:t> QA, AI </a:t>
                       </a:r>
                       <a:r>
                         <a:rPr sz="1150" b="0" dirty="0" err="1">
@@ -33000,7 +33000,7 @@
                   <a:srgbClr val="6B7280"/>
                 </a:solidFill>
               </a:rPr>
-              <a:t>한빛글로벌 SyncGuard AI 시스템 구축 착수보고서</a:t>
+              <a:t>한빛글로벌 SyncFlow AI 시스템 구축 착수보고서</a:t>
             </a:r>
           </a:p>
         </p:txBody>
@@ -33499,7 +33499,7 @@
                   <a:srgbClr val="374151"/>
                 </a:solidFill>
               </a:rPr>
-              <a:t>시안·심의</a:t>
+              <a:t>계약·도서·검증</a:t>
             </a:r>
             <a:r>
               <a:rPr sz="1200" b="0" dirty="0">
@@ -35210,7 +35210,7 @@
                   <a:srgbClr val="6B7280"/>
                 </a:solidFill>
               </a:rPr>
-              <a:t>한빛글로벌 SyncGuard AI 시스템 구축 착수보고서</a:t>
+              <a:t>한빛글로벌 SyncFlow AI 시스템 구축 착수보고서</a:t>
             </a:r>
           </a:p>
         </p:txBody>
@@ -36729,7 +36729,7 @@
                   <a:srgbClr val="6B7280"/>
                 </a:solidFill>
               </a:rPr>
-              <a:t>한빛글로벌 SyncGuard AI 시스템 구축 착수보고서</a:t>
+              <a:t>한빛글로벌 SyncFlow AI 시스템 구축 착수보고서</a:t>
             </a:r>
           </a:p>
         </p:txBody>
@@ -37182,7 +37182,7 @@
                           </a:solidFill>
                           <a:latin typeface="Malgun Gothic"/>
                         </a:rPr>
-                        <a:t>고객사 PM 및 RA 전담팀 지정</a:t>
+                        <a:t>고객사 PM 및 QA 전담팀 지정</a:t>
                       </a:r>
                     </a:p>
                   </a:txBody>
@@ -37232,7 +37232,7 @@
                           </a:solidFill>
                           <a:latin typeface="Malgun Gothic"/>
                         </a:rPr>
-                        <a:t>연구전략Lab / ERP플랫폼기획 / RA Lab</a:t>
+                        <a:t>공급망혁신팀 / ERP플랫폼기획 / 품질법무검증팀</a:t>
                       </a:r>
                     </a:p>
                   </a:txBody>
@@ -37339,7 +37339,7 @@
                           </a:solidFill>
                           <a:latin typeface="Malgun Gothic"/>
                         </a:rPr>
-                        <a:t>동영상(쇼츠) 및 JPG 상세페이지 샘플 파일 전달</a:t>
+                        <a:t>물품공급계약서(PDF) 및 CAD 설계도면 샘플 파일 전달</a:t>
                       </a:r>
                     </a:p>
                   </a:txBody>
@@ -37783,7 +37783,7 @@
                           </a:solidFill>
                           <a:latin typeface="Malgun Gothic"/>
                         </a:rPr>
-                        <a:t>식약처 가이드라인 및 사내 심의 기준 자료 전달</a:t>
+                        <a:t>공정위·표준원 가이드라인 및 사내 검증 기준 자료 전달</a:t>
                       </a:r>
                     </a:p>
                   </a:txBody>
@@ -37830,7 +37830,7 @@
                           </a:solidFill>
                           <a:latin typeface="Malgun Gothic"/>
                         </a:rPr>
-                        <a:t>한빛글로벌 (RA Lab)</a:t>
+                        <a:t>한빛글로벌 (품질법무검증팀)</a:t>
                       </a:r>
                     </a:p>
                   </a:txBody>
@@ -37978,7 +37978,7 @@
                           </a:solidFill>
                           <a:latin typeface="Malgun Gothic"/>
                         </a:rPr>
-                        <a:t>한빛글로벌 (RA Lab)</a:t>
+                        <a:t>한빛글로벌 (품질법무검증팀)</a:t>
                       </a:r>
                     </a:p>
                   </a:txBody>
@@ -38079,7 +38079,7 @@
                           </a:solidFill>
                           <a:latin typeface="Malgun Gothic"/>
                         </a:rPr>
-                        <a:t>동영상(쇼츠) 및 긴 JPG 이미지 처리 기술 PoC 수행/검토</a:t>
+                        <a:t>설계도면(도면시트) 및 긴 JPG 이미지 처리 기술 PoC 수행/검토</a:t>
                       </a:r>
                     </a:p>
                   </a:txBody>
@@ -38602,7 +38602,7 @@
                 </a:solidFill>
                 <a:latin typeface="Malgun Gothic"/>
               </a:rPr>
-              <a:t>10/19 쇼츠/JPG 샘플 전달</a:t>
+              <a:t>10/19 도면시트/JPG 샘플 전달</a:t>
             </a:r>
           </a:p>
           <a:p>
@@ -38626,7 +38626,7 @@
                 </a:solidFill>
                 <a:latin typeface="Malgun Gothic"/>
               </a:rPr>
-              <a:t>10/23 1차 심의자료/골든셋(50건, 골든셋 표준화 여부 검토 완료 후 단계적 적용 협의) 전달, 제1차 정례 회의</a:t>
+              <a:t>10/23 1차 검증자료/골든셋(50건, 골든셋 표준화 여부 검토 완료 후 단계적 적용 협의) 전달, 제1차 정례 회의</a:t>
             </a:r>
           </a:p>
         </p:txBody>
@@ -38694,7 +38694,7 @@
                   <a:srgbClr val="6B7280"/>
                 </a:solidFill>
               </a:rPr>
-              <a:t>한빛글로벌 SyncGuard AI 시스템 구축 착수보고서</a:t>
+              <a:t>한빛글로벌 SyncFlow AI 시스템 구축 착수보고서</a:t>
             </a:r>
           </a:p>
         </p:txBody>
@@ -38917,7 +38917,7 @@
                   <a:srgbClr val="C8D3E6"/>
                 </a:solidFill>
               </a:rPr>
-              <a:t>SyncGuard</a:t>
+              <a:t>SyncFlow</a:t>
             </a:r>
             <a:r>
               <a:rPr sz="1600" b="0" dirty="0">
@@ -39184,7 +39184,7 @@
                   <a:srgbClr val="6B7280"/>
                 </a:solidFill>
               </a:rPr>
-              <a:t>광고</a:t>
+              <a:t>구매계약</a:t>
             </a:r>
             <a:r>
               <a:rPr sz="1300" b="0" dirty="0">
@@ -39200,7 +39200,7 @@
                   <a:srgbClr val="6B7280"/>
                 </a:solidFill>
               </a:rPr>
-              <a:t>시안의</a:t>
+              <a:t>계약·도서의</a:t>
             </a:r>
             <a:r>
               <a:rPr sz="1300" b="0" dirty="0">
@@ -39216,7 +39216,7 @@
                   <a:srgbClr val="6B7280"/>
                 </a:solidFill>
               </a:rPr>
-              <a:t>표시·광고</a:t>
+              <a:t>계약·기술규격</a:t>
             </a:r>
             <a:r>
               <a:rPr lang="ko-KR" altLang="en-US" sz="1300" b="0" dirty="0" err="1">
@@ -39336,7 +39336,7 @@
                   <a:srgbClr val="6B7280"/>
                 </a:solidFill>
               </a:rPr>
-              <a:t>, RA </a:t>
+              <a:t>, QA </a:t>
             </a:r>
             <a:r>
               <a:rPr sz="1300" b="0" dirty="0" err="1">
@@ -39408,7 +39408,7 @@
                   <a:srgbClr val="6B7280"/>
                 </a:solidFill>
               </a:rPr>
-              <a:t>심의하는</a:t>
+              <a:t>검증하는</a:t>
             </a:r>
             <a:r>
               <a:rPr sz="1300" b="0" dirty="0">
@@ -39565,7 +39565,7 @@
                             <a:srgbClr val="374151"/>
                           </a:solidFill>
                         </a:rPr>
-                        <a:t>한빛글로벌 SyncGuard AI 시스템 구축</a:t>
+                        <a:t>한빛글로벌 SyncFlow AI 시스템 구축</a:t>
                       </a:r>
                     </a:p>
                   </a:txBody>
@@ -39672,7 +39672,7 @@
                             <a:srgbClr val="374151"/>
                           </a:solidFill>
                         </a:rPr>
-                        <a:t>화장품</a:t>
+                        <a:t>전장부품</a:t>
                       </a:r>
                       <a:r>
                         <a:rPr sz="1200" b="0" dirty="0">
@@ -39688,7 +39688,7 @@
                             <a:srgbClr val="374151"/>
                           </a:solidFill>
                         </a:rPr>
-                        <a:t>광고</a:t>
+                        <a:t>구매계약</a:t>
                       </a:r>
                       <a:r>
                         <a:rPr sz="1200" b="0" dirty="0">
@@ -39704,7 +39704,7 @@
                             <a:srgbClr val="374151"/>
                           </a:solidFill>
                         </a:rPr>
-                        <a:t>시안의</a:t>
+                        <a:t>계약·도서의</a:t>
                       </a:r>
                       <a:r>
                         <a:rPr sz="1200" b="0" dirty="0">
@@ -39720,7 +39720,7 @@
                             <a:srgbClr val="374151"/>
                           </a:solidFill>
                         </a:rPr>
-                        <a:t>표시·광고</a:t>
+                        <a:t>계약·기술규격</a:t>
                       </a:r>
                       <a:r>
                         <a:rPr lang="ko-KR" altLang="en-US" sz="1200" b="0" dirty="0" err="1">
@@ -39824,7 +39824,7 @@
                             <a:srgbClr val="374151"/>
                           </a:solidFill>
                         </a:rPr>
-                        <a:t> RA </a:t>
+                        <a:t> QA </a:t>
                       </a:r>
                       <a:r>
                         <a:rPr sz="1200" b="0" dirty="0" err="1">
@@ -39864,7 +39864,7 @@
                             <a:srgbClr val="374151"/>
                           </a:solidFill>
                         </a:rPr>
-                        <a:t>심의를</a:t>
+                        <a:t>검증을</a:t>
                       </a:r>
                       <a:r>
                         <a:rPr sz="1200" b="0" dirty="0">
@@ -40403,7 +40403,7 @@
                             <a:srgbClr val="374151"/>
                           </a:solidFill>
                         </a:rPr>
-                        <a:t>ProductLab</a:t>
+                        <a:t>PLM-Nexus</a:t>
                       </a:r>
                       <a:r>
                         <a:rPr sz="1200" b="0" dirty="0">
@@ -40534,7 +40534,7 @@
                             <a:srgbClr val="374151"/>
                           </a:solidFill>
                         </a:rPr>
-                        <a:t>마케터</a:t>
+                        <a:t>구매담당자</a:t>
                       </a:r>
                       <a:r>
                         <a:rPr sz="1200" b="0" dirty="0">
@@ -40558,7 +40558,7 @@
                             <a:srgbClr val="374151"/>
                           </a:solidFill>
                         </a:rPr>
-                        <a:t>, RA </a:t>
+                        <a:t>, QA </a:t>
                       </a:r>
                       <a:r>
                         <a:rPr sz="1200" b="0" dirty="0" err="1">
@@ -40818,7 +40818,7 @@
                   <a:srgbClr val="0F2340"/>
                 </a:solidFill>
               </a:rPr>
-              <a:t>심의 시간 단축</a:t>
+              <a:t>검증 시간 단축</a:t>
             </a:r>
           </a:p>
         </p:txBody>
@@ -40856,7 +40856,7 @@
                   <a:srgbClr val="4B5563"/>
                 </a:solidFill>
               </a:rPr>
-              <a:t>시안을 올리면 AI가 문장별 위험도와 근거를 먼저 보여 줘, 검토를 바로 시작할 수 있습니다.</a:t>
+              <a:t>계약·도서을 올리면 AI가 문장별 위험도와 근거를 먼저 보여 줘, 검토를 바로 시작할 수 있습니다.</a:t>
             </a:r>
           </a:p>
         </p:txBody>
@@ -41032,7 +41032,7 @@
                   <a:srgbClr val="4B5563"/>
                 </a:solidFill>
               </a:rPr>
-              <a:t>식약처 기준과 사내 심의 기준을 같은 방식으로 적용해 담당자별 판단 차이를 줄입니다.</a:t>
+              <a:t>공정위·표준원 기준과 사내 검증 기준을 같은 방식으로 적용해 담당자별 판단 차이를 줄입니다.</a:t>
             </a:r>
           </a:p>
         </p:txBody>
@@ -41170,7 +41170,7 @@
                   <a:srgbClr val="0F2340"/>
                 </a:solidFill>
               </a:rPr>
-              <a:t>심의 자산 축적</a:t>
+              <a:t>검증 자산 축적</a:t>
             </a:r>
           </a:p>
         </p:txBody>
@@ -41208,7 +41208,7 @@
                   <a:srgbClr val="4B5563"/>
                 </a:solidFill>
               </a:rPr>
-              <a:t>RA가 확정한 판정과 대체 표현을 기록해 다음 심의와 문구 작성에 다시 씁니다.</a:t>
+              <a:t>QA가 확정한 판정과 대체 표현을 기록해 다음 검증와 조항 작성에 다시 씁니다.</a:t>
             </a:r>
           </a:p>
         </p:txBody>
@@ -41276,7 +41276,7 @@
                   <a:srgbClr val="6B7280"/>
                 </a:solidFill>
               </a:rPr>
-              <a:t>한빛글로벌 SyncGuard AI 시스템 구축 착수보고서</a:t>
+              <a:t>한빛글로벌 SyncFlow AI 시스템 구축 착수보고서</a:t>
             </a:r>
           </a:p>
         </p:txBody>
@@ -41491,7 +41491,7 @@
                   <a:srgbClr val="6B7280"/>
                 </a:solidFill>
               </a:rPr>
-              <a:t>규제 기준은 세분화되고 검토할 시안은 늘어, 사람의 검토만으로는 속도와 일관성을 함께 지키기 어렵습니다.</a:t>
+              <a:t>규제 기준은 세분화되고 검토할 계약·도서은 늘어, 사람의 검토만으로는 속도와 일관성을 함께 지키기 어렵습니다.</a:t>
             </a:r>
           </a:p>
         </p:txBody>
@@ -41632,7 +41632,7 @@
                   <a:srgbClr val="374151"/>
                 </a:solidFill>
               </a:rPr>
-              <a:t>표시·광고 공정화법 제3조와 시행규칙 [별표 5] 표시·광고 준수사항 점검 강화</a:t>
+              <a:t>하도급법 제3조의4와 시행규칙 [별표 5] 계약·기술규격 준수사항 점검 강화</a:t>
             </a:r>
           </a:p>
           <a:p>
@@ -41655,7 +41655,7 @@
                   <a:srgbClr val="374151"/>
                 </a:solidFill>
               </a:rPr>
-              <a:t>의약품 오인, 신체 부위 표현, 실증이 필요한 효능 표현 등 기준 세분화</a:t>
+              <a:t>불공정 독소조항, 부당 원가전가 표현, 시험검증이 필요한 성능규격 표현 등 기준 세분화</a:t>
             </a:r>
           </a:p>
           <a:p>
@@ -41678,7 +41678,7 @@
                   <a:srgbClr val="374151"/>
                 </a:solidFill>
               </a:rPr>
-              <a:t>위반 시 행정처분과 브랜드 신뢰도 하락 위험</a:t>
+              <a:t>위반 시 시정명령·심결과 사업본부 신뢰도 하락 위험</a:t>
             </a:r>
           </a:p>
         </p:txBody>
@@ -41819,7 +41819,7 @@
                   <a:srgbClr val="374151"/>
                 </a:solidFill>
               </a:rPr>
-              <a:t>상세페이지·SNS 등 매체가 늘며 검토 요청 증가</a:t>
+              <a:t>계약서·기술시방서 등 매체가 늘며 검토 요청 증가</a:t>
             </a:r>
           </a:p>
           <a:p>
@@ -41842,7 +41842,7 @@
                   <a:srgbClr val="374151"/>
                 </a:solidFill>
               </a:rPr>
-              <a:t>시안을 눈으로 확인하고 기준 문서와 직접 대조</a:t>
+              <a:t>계약·도서을 눈으로 확인하고 기준 문서와 직접 대조</a:t>
             </a:r>
           </a:p>
           <a:p>
@@ -41983,7 +41983,7 @@
                   <a:srgbClr val="0F2340"/>
                 </a:solidFill>
               </a:rPr>
-              <a:t>AI 1차 점검과 전문가 심의의 결합</a:t>
+              <a:t>AI 1차 점검과 전문가 검증의 결합</a:t>
             </a:r>
           </a:p>
           <a:p>
@@ -42006,7 +42006,7 @@
                   <a:srgbClr val="374151"/>
                 </a:solidFill>
               </a:rPr>
-              <a:t>시안에서 문장을 뽑아 기준에 따라 1차 점검</a:t>
+              <a:t>계약·도서에서 문장을 뽑아 기준에 따라 1차 점검</a:t>
             </a:r>
           </a:p>
           <a:p>
@@ -42052,7 +42052,7 @@
                   <a:srgbClr val="374151"/>
                 </a:solidFill>
               </a:rPr>
-              <a:t>RA는 최종 판단에 집중하고 결과는 자산으로 축적</a:t>
+              <a:t>QA는 최종 판단에 집중하고 결과는 자산으로 축적</a:t>
             </a:r>
           </a:p>
         </p:txBody>
@@ -42382,7 +42382,7 @@
                             <a:srgbClr val="374151"/>
                           </a:solidFill>
                         </a:rPr>
-                        <a:t>시안 1건당 2~3 영업일(추정)</a:t>
+                        <a:t>계약·도서 1건당 2~3 영업일(추정)</a:t>
                       </a:r>
                     </a:p>
                   </a:txBody>
@@ -42855,7 +42855,7 @@
                             <a:srgbClr val="374151"/>
                           </a:solidFill>
                         </a:rPr>
-                        <a:t>확정 문구와 근거를 한곳에 기록</a:t>
+                        <a:t>확정 조항과 근거를 한곳에 기록</a:t>
                       </a:r>
                     </a:p>
                   </a:txBody>
@@ -42905,7 +42905,7 @@
                             <a:srgbClr val="374151"/>
                           </a:solidFill>
                         </a:rPr>
-                        <a:t>다음 심의·문구 작성에 재활용</a:t>
+                        <a:t>다음 검증·조항 작성에 재활용</a:t>
                       </a:r>
                     </a:p>
                   </a:txBody>
@@ -43050,7 +43050,7 @@
                   <a:srgbClr val="6B7280"/>
                 </a:solidFill>
               </a:rPr>
-              <a:t>한빛글로벌 SyncGuard AI 시스템 구축 착수보고서</a:t>
+              <a:t>한빛글로벌 SyncFlow AI 시스템 구축 착수보고서</a:t>
             </a:r>
           </a:p>
         </p:txBody>
@@ -43329,7 +43329,7 @@
                   <a:srgbClr val="6B7280"/>
                 </a:solidFill>
               </a:rPr>
-              <a:t>실증자료</a:t>
+              <a:t>시험성적서</a:t>
             </a:r>
             <a:r>
               <a:rPr sz="1300" b="0" dirty="0">
@@ -43361,7 +43361,7 @@
                   <a:srgbClr val="6B7280"/>
                 </a:solidFill>
               </a:rPr>
-              <a:t>ProductLab</a:t>
+              <a:t>PLM-Nexus</a:t>
             </a:r>
             <a:r>
               <a:rPr sz="1300" b="0" dirty="0">
@@ -43665,7 +43665,7 @@
                   <a:srgbClr val="374151"/>
                 </a:solidFill>
               </a:rPr>
-              <a:t>심의</a:t>
+              <a:t>검증</a:t>
             </a:r>
             <a:r>
               <a:rPr sz="1050" b="0" dirty="0">
@@ -43845,7 +43845,7 @@
                   <a:srgbClr val="374151"/>
                 </a:solidFill>
               </a:rPr>
-              <a:t>실증자료</a:t>
+              <a:t>시험성적서</a:t>
             </a:r>
             <a:r>
               <a:rPr sz="1050" b="0" dirty="0">
@@ -43877,7 +43877,7 @@
                   <a:srgbClr val="374151"/>
                 </a:solidFill>
               </a:rPr>
-              <a:t>ProductLab</a:t>
+              <a:t>PLM-Nexus</a:t>
             </a:r>
             <a:r>
               <a:rPr sz="1050" b="0" dirty="0">
@@ -44115,7 +44115,7 @@
                   <a:srgbClr val="374151"/>
                 </a:solidFill>
               </a:rPr>
-              <a:t>유사 심의 사례 검토</a:t>
+              <a:t>유사 검증 사례 검토</a:t>
             </a:r>
           </a:p>
         </p:txBody>
@@ -44368,7 +44368,7 @@
                   <a:srgbClr val="374151"/>
                 </a:solidFill>
               </a:rPr>
-              <a:t>실증자료 필요 판단</a:t>
+              <a:t>시험성적서 필요 판단</a:t>
             </a:r>
           </a:p>
           <a:p>
@@ -45114,7 +45114,7 @@
                   <a:srgbClr val="0F2340"/>
                 </a:solidFill>
               </a:rPr>
-              <a:t>05 심의·검토 화면 (관리자)</a:t>
+              <a:t>05 검증·검토 화면 (관리자)</a:t>
             </a:r>
           </a:p>
         </p:txBody>
@@ -45244,7 +45244,7 @@
                   <a:srgbClr val="374151"/>
                 </a:solidFill>
               </a:rPr>
-              <a:t>실증 검증 화면</a:t>
+              <a:t>시험검증 검증 화면</a:t>
             </a:r>
           </a:p>
           <a:p>
@@ -45290,7 +45290,7 @@
                   <a:srgbClr val="374151"/>
                 </a:solidFill>
               </a:rPr>
-              <a:t>RA 최종 판정 입력</a:t>
+              <a:t>QA 최종 판정 입력</a:t>
             </a:r>
           </a:p>
           <a:p>
@@ -45313,7 +45313,7 @@
                   <a:srgbClr val="374151"/>
                 </a:solidFill>
               </a:rPr>
-              <a:t>심의 이력 검색</a:t>
+              <a:t>검증 이력 검색</a:t>
             </a:r>
           </a:p>
         </p:txBody>
@@ -45520,7 +45520,7 @@
                   <a:srgbClr val="374151"/>
                 </a:solidFill>
               </a:rPr>
-              <a:t>수정 불가 심의 이력</a:t>
+              <a:t>수정 불가 검증 이력</a:t>
             </a:r>
           </a:p>
           <a:p>
@@ -45773,7 +45773,7 @@
                   <a:srgbClr val="374151"/>
                 </a:solidFill>
               </a:rPr>
-              <a:t>MarketingHub 결과(HTML/JSON) 인터페이스 전달</a:t>
+              <a:t>SRM-Portal 결과(HTML/JSON) 인터페이스 전달</a:t>
             </a:r>
           </a:p>
           <a:p>
@@ -45796,7 +45796,7 @@
                   <a:srgbClr val="374151"/>
                 </a:solidFill>
               </a:rPr>
-              <a:t>KT 레몬 기준 데이터</a:t>
+              <a:t>HB-Monitor 기준 데이터</a:t>
             </a:r>
           </a:p>
           <a:p>
@@ -45819,7 +45819,7 @@
                   <a:srgbClr val="374151"/>
                 </a:solidFill>
               </a:rPr>
-              <a:t>ProductLab 실증자료 연동</a:t>
+              <a:t>PLM-Nexus 시험성적서 연동</a:t>
             </a:r>
           </a:p>
         </p:txBody>
@@ -46186,7 +46186,7 @@
                   <a:srgbClr val="6B7280"/>
                 </a:solidFill>
               </a:rPr>
-              <a:t>한빛글로벌 SyncGuard AI 시스템 구축 착수보고서</a:t>
+              <a:t>한빛글로벌 SyncFlow AI 시스템 구축 착수보고서</a:t>
             </a:r>
           </a:p>
         </p:txBody>
@@ -46659,7 +46659,7 @@
                             <a:srgbClr val="374151"/>
                           </a:solidFill>
                         </a:rPr>
-                        <a:t>대상 시안</a:t>
+                        <a:t>대상 계약·도서</a:t>
                       </a:r>
                     </a:p>
                   </a:txBody>
@@ -46709,7 +46709,7 @@
                           </a:solidFill>
                           <a:latin typeface="Malgun Gothic"/>
                         </a:rPr>
-                        <a:t>PPTX·PDF 시안, 시안 내 텍스트/이미지, 국문/영문 혼용 문구(번역 연계)</a:t>
+                        <a:t>PPTX·PDF 계약·도서, 계약·도서 내 텍스트/이미지, 국문/영문 혼용 조항(번역 연계)</a:t>
                       </a:r>
                     </a:p>
                   </a:txBody>
@@ -46759,7 +46759,7 @@
                           </a:solidFill>
                           <a:latin typeface="Malgun Gothic"/>
                         </a:rPr>
-                        <a:t>해외 법률 심의, 인물 얼굴/딥페이크 판별 제외</a:t>
+                        <a:t>해외 법률 검증, 3D 솔리드 모델링 구조 해석 제외</a:t>
                       </a:r>
                     </a:p>
                     <a:p>
@@ -46771,7 +46771,7 @@
                           </a:solidFill>
                           <a:latin typeface="Malgun Gothic"/>
                         </a:rPr>
-                        <a:t>※ 숏폼 영상 및 긴 JPG 상세페이지는 기술 PoC 우선 수행 후 단계적 적용 협의</a:t>
+                        <a:t>※ 대용량 CAD 설계도면 및 스캔 계약서는 기술 PoC 우선 수행 후 단계적 적용 협의</a:t>
                       </a:r>
                     </a:p>
                   </a:txBody>
@@ -46878,7 +46878,7 @@
                           </a:solidFill>
                           <a:latin typeface="Malgun Gothic"/>
                         </a:rPr>
-                        <a:t>국내 제품 표시·광고 기준, 사내 심의 기준(표현 사전)</a:t>
+                        <a:t>국내 구매계약·기술규격 기준, 사내 검증 기준(표현 사전)</a:t>
                       </a:r>
                     </a:p>
                   </a:txBody>
@@ -46982,7 +46982,7 @@
                             <a:srgbClr val="374151"/>
                           </a:solidFill>
                         </a:rPr>
-                        <a:t>MarketingHub</a:t>
+                        <a:t>SRM-Portal</a:t>
                       </a:r>
                     </a:p>
                   </a:txBody>
@@ -47029,7 +47029,7 @@
                           </a:solidFill>
                           <a:latin typeface="Malgun Gothic"/>
                         </a:rPr>
-                        <a:t>심의 의뢰 연계, 판정 결과(HTML/JSON) 인터페이스 전달(마케팅허브 화면 표출) 및 관리자 뷰어 연동</a:t>
+                        <a:t>검증 요청 연계, 판정 결과(HTML/JSON) 인터페이스 전달(전자구매포털 화면 표출) 및 관리자 뷰어 연동</a:t>
                       </a:r>
                     </a:p>
                   </a:txBody>
@@ -47133,7 +47133,7 @@
                             <a:srgbClr val="374151"/>
                           </a:solidFill>
                         </a:rPr>
-                        <a:t>KT 레몬</a:t>
+                        <a:t>HB-Monitor</a:t>
                       </a:r>
                     </a:p>
                   </a:txBody>
@@ -47180,7 +47180,7 @@
                           </a:solidFill>
                           <a:latin typeface="Malgun Gothic"/>
                         </a:rPr>
-                        <a:t>성분·원료 기준 데이터 활용 검토 (비교 PoC 후 연계 결정)</a:t>
+                        <a:t>성분·원소재 기준 데이터 활용 검토 (비교 PoC 후 연계 결정)</a:t>
                       </a:r>
                     </a:p>
                   </a:txBody>
@@ -47227,7 +47227,7 @@
                           </a:solidFill>
                           <a:latin typeface="Malgun Gothic"/>
                         </a:rPr>
-                        <a:t>처방·배합 적합성 판정 (별개 검토 분리)</a:t>
+                        <a:t>설계사양·조성 적합성 판정 (별개 검토 분리)</a:t>
                       </a:r>
                     </a:p>
                   </a:txBody>
@@ -47284,7 +47284,7 @@
                             <a:srgbClr val="374151"/>
                           </a:solidFill>
                         </a:rPr>
-                        <a:t>심의 확정</a:t>
+                        <a:t>검증 확정</a:t>
                       </a:r>
                     </a:p>
                   </a:txBody>
@@ -47331,7 +47331,7 @@
                           </a:solidFill>
                           <a:latin typeface="Malgun Gothic"/>
                         </a:rPr>
-                        <a:t>AI 1차 점검, 3단계 판정 하향 금지, RA 확정 지원</a:t>
+                        <a:t>AI 1차 점검, 3단계 판정 하향 금지, QA 확정 지원</a:t>
                       </a:r>
                     </a:p>
                   </a:txBody>
@@ -47876,7 +47876,7 @@
                           </a:solidFill>
                           <a:latin typeface="Malgun Gothic"/>
                         </a:rPr>
-                        <a:t>사내 SSO(IAM), MarketingHub(결과 HTML/JSON 인터페이스·뷰어 연동), ProductLab(실증DB 연계) 확정, KT레몬 비교 PoC 진행</a:t>
+                        <a:t>사내 SSO(IAM), SRM-Portal(결과 HTML/JSON 인터페이스·뷰어 연동), PLM-Nexus(시험검증DB 연계) 확정, HB-Monitor 비교 PoC 진행</a:t>
                       </a:r>
                     </a:p>
                   </a:txBody>
@@ -47977,7 +47977,7 @@
                           </a:solidFill>
                           <a:latin typeface="Malgun Gothic"/>
                         </a:rPr>
-                        <a:t>동영상 및 JPG PoC</a:t>
+                        <a:t>설계도면 및 JPG PoC</a:t>
                       </a:r>
                     </a:p>
                   </a:txBody>
@@ -48024,7 +48024,7 @@
                           </a:solidFill>
                           <a:latin typeface="Malgun Gothic"/>
                         </a:rPr>
-                        <a:t>숏폼 동영상(자막/캡처) 및 스크롤형 JPG 장표 분할 기술 PoC 수행 및 일정/공수 분석</a:t>
+                        <a:t>도면요약 설계도면(자막/스냅샷) 및 스크롤형 JPG 장표 분할 기술 PoC 수행 및 일정/공수 분석</a:t>
                       </a:r>
                     </a:p>
                   </a:txBody>
@@ -48172,7 +48172,7 @@
                           </a:solidFill>
                           <a:latin typeface="Malgun Gothic"/>
                         </a:rPr>
-                        <a:t>외부 상용 LLM 기업 계약(Zero Data Retention, 미출시 시안 비학습 옵션) 적용 확정</a:t>
+                        <a:t>외부 상용 LLM 기업 계약(Zero Data Retention, 미출시 계약·도서 비학습 옵션) 적용 확정</a:t>
                       </a:r>
                     </a:p>
                   </a:txBody>
@@ -48320,7 +48320,7 @@
                           </a:solidFill>
                           <a:latin typeface="Malgun Gothic"/>
                         </a:rPr>
-                        <a:t>금지 표현 검출률 95% 이상, RA 판정 일치율 90% 이상 / 프로토타입 기반 최종 확정</a:t>
+                        <a:t>금지 표현 검출률 95% 이상, 법무·QA 판정 일치율 90% 이상 / 프로토타입 기반 최종 확정</a:t>
                       </a:r>
                     </a:p>
                   </a:txBody>
@@ -48725,7 +48725,7 @@
                   <a:srgbClr val="6B7280"/>
                 </a:solidFill>
               </a:rPr>
-              <a:t>한빛글로벌 SyncGuard AI 시스템 구축 착수보고서</a:t>
+              <a:t>한빛글로벌 SyncFlow AI 시스템 구축 착수보고서</a:t>
             </a:r>
           </a:p>
         </p:txBody>
@@ -49107,7 +49107,7 @@
                   <a:srgbClr val="374151"/>
                 </a:solidFill>
               </a:rPr>
-              <a:t>현행 심의 절차 분석</a:t>
+              <a:t>현행 검증 절차 분석</a:t>
             </a:r>
           </a:p>
           <a:p>
@@ -49130,7 +49130,7 @@
                   <a:srgbClr val="374151"/>
                 </a:solidFill>
               </a:rPr>
-              <a:t>실증자료 DB 요건 분석</a:t>
+              <a:t>시험성적서 DB 요건 분석</a:t>
             </a:r>
           </a:p>
           <a:p>
@@ -49650,7 +49650,7 @@
                   <a:srgbClr val="374151"/>
                 </a:solidFill>
               </a:rPr>
-              <a:t>실증 DB 구축 및 화면·연계 개발</a:t>
+              <a:t>시험검증 DB 구축 및 화면·연계 개발</a:t>
             </a:r>
           </a:p>
           <a:p>
@@ -50389,7 +50389,7 @@
                   <a:srgbClr val="4B5563"/>
                 </a:solidFill>
               </a:rPr>
-              <a:t>골든셋 정답 확인(골든셋 표준화 여부 검토 완료 후 단계적 적용 협의)과 파일럿에 RA·마케터가 참여해 실제 업무 기준으로 품질을 확인합니다.</a:t>
+              <a:t>골든셋 정답 확인(골든셋 표준화 여부 검토 완료 후 단계적 적용 협의)과 파일럿에 QA·구매담당자가 참여해 실제 업무 기준으로 품질을 확인합니다.</a:t>
             </a:r>
           </a:p>
         </p:txBody>
@@ -50505,7 +50505,7 @@
                   <a:srgbClr val="4B5563"/>
                 </a:solidFill>
               </a:rPr>
-              <a:t>10~11월에 연계 규격을 정하고 가상 연계기 및 실증 DB 구축으로 사내 일정 영향을 줄입니다.</a:t>
+              <a:t>10~11월에 연계 규격을 정하고 가상 연계기 및 시험검증 DB 구축으로 사내 일정 영향을 줄입니다.</a:t>
             </a:r>
           </a:p>
         </p:txBody>
@@ -50689,7 +50689,7 @@
                   <a:srgbClr val="6B7280"/>
                 </a:solidFill>
               </a:rPr>
-              <a:t>한빛글로벌 SyncGuard AI 시스템 구축 착수보고서</a:t>
+              <a:t>한빛글로벌 SyncFlow AI 시스템 구축 착수보고서</a:t>
             </a:r>
           </a:p>
         </p:txBody>
@@ -50904,7 +50904,7 @@
                   <a:srgbClr val="6B7280"/>
                 </a:solidFill>
               </a:rPr>
-              <a:t>관리자 웹 화면, 업무 서버, AI 판정 엔진, 데이터 저장소로 구성하고, 심의 의뢰·결과 화면 표출은 MarketingHub 인터페이스(HTML/JSON)로 연계합니다.</a:t>
+              <a:t>관리자 웹 화면, 업무 서버, AI 판정 엔진, 데이터 저장소로 구성하고, 검증 요청·결과 화면 표출은 SRM-Portal 인터페이스(HTML/JSON)로 연계합니다.</a:t>
             </a:r>
           </a:p>
         </p:txBody>
@@ -50987,7 +50987,7 @@
                   <a:srgbClr val="374151"/>
                 </a:solidFill>
               </a:rPr>
-              <a:t>마케터</a:t>
+              <a:t>구매담당자</a:t>
             </a:r>
           </a:p>
         </p:txBody>
@@ -51077,7 +51077,7 @@
                   <a:srgbClr val="374151"/>
                 </a:solidFill>
               </a:rPr>
-              <a:t>RA 담당자</a:t>
+              <a:t>법무·QA 담당자</a:t>
             </a:r>
           </a:p>
         </p:txBody>
@@ -51309,7 +51309,7 @@
                   <a:srgbClr val="0F2340"/>
                 </a:solidFill>
               </a:rPr>
-              <a:t>심의·검토 화면 (관리자 통합)</a:t>
+              <a:t>검증·검토 화면 (관리자 통합)</a:t>
             </a:r>
           </a:p>
           <a:p>
@@ -51324,8 +51324,8 @@
                   <a:srgbClr val="4B5563"/>
                 </a:solidFill>
               </a:rPr>
-              <a:t>문장 편집, 결과 대조, 실증 검증, RA 확정, 이력 검색
-(심의 결과 HTML 등은 인터페이스로 MarketingHub 전달·표출)</a:t>
+              <a:t>문장 편집, 결과 대조, 시험검증 검증, QA 확정, 이력 검색
+(검증 결과 HTML 등은 인터페이스로 SRM-Portal 전달·표출)</a:t>
             </a:r>
           </a:p>
           <a:p>
@@ -51422,7 +51422,7 @@
                 </a:solidFill>
                 <a:latin typeface="Malgun Gothic"/>
               </a:rPr>
-              <a:t>MarketingHub</a:t>
+              <a:t>SRM-Portal</a:t>
             </a:r>
           </a:p>
           <a:p>
@@ -51434,7 +51434,7 @@
                 </a:solidFill>
                 <a:latin typeface="Malgun Gothic"/>
               </a:rPr>
-              <a:t>의뢰 연계 · 결과(HTML/JSON) 전달 및 마케팅허브 화면 표출</a:t>
+              <a:t>의뢰 연계 · 결과(HTML/JSON) 전달 및 전자구매포털 화면 표출</a:t>
             </a:r>
           </a:p>
         </p:txBody>
@@ -51564,7 +51564,7 @@
                   <a:srgbClr val="374151"/>
                 </a:solidFill>
               </a:rPr>
-              <a:t>심의 요청 · 대외 I/F 연계</a:t>
+              <a:t>검증 요청 · 대외 I/F 연계</a:t>
             </a:r>
           </a:p>
           <a:p>
@@ -51584,7 +51584,7 @@
                   <a:srgbClr val="374151"/>
                 </a:solidFill>
               </a:rPr>
-              <a:t>판정 결과 · RA 확정 · 상충탐지</a:t>
+              <a:t>판정 결과 · QA 확정 · 상충탐지</a:t>
             </a:r>
           </a:p>
           <a:p>
@@ -51604,7 +51604,7 @@
                   <a:srgbClr val="374151"/>
                 </a:solidFill>
               </a:rPr>
-              <a:t>결과서(HTML/PDF) · 실증요청 메일</a:t>
+              <a:t>결과서(HTML/PDF) · 성적서요청 메일</a:t>
             </a:r>
           </a:p>
           <a:p>
@@ -51821,7 +51821,7 @@
                   <a:srgbClr val="374151"/>
                 </a:solidFill>
               </a:rPr>
-              <a:t>문서/영상 피크프레임·각주 추출, OCR</a:t>
+              <a:t>문서/영상 도면스냅샷·특약주석 추출, OCR</a:t>
             </a:r>
           </a:p>
         </p:txBody>
@@ -52150,7 +52150,7 @@
                 </a:solidFill>
                 <a:latin typeface="Malgun Gothic"/>
               </a:rPr>
-              <a:t>KT 레몬</a:t>
+              <a:t>HB-Monitor</a:t>
             </a:r>
           </a:p>
           <a:p>
@@ -52226,7 +52226,7 @@
                 </a:solidFill>
                 <a:latin typeface="Malgun Gothic"/>
               </a:rPr>
-              <a:t>ProductLab</a:t>
+              <a:t>PLM-Nexus</a:t>
             </a:r>
           </a:p>
           <a:p>
@@ -52238,7 +52238,7 @@
                 </a:solidFill>
                 <a:latin typeface="Malgun Gothic"/>
               </a:rPr>
-              <a:t>전성분·배합한도 및 세포효능·기술원 실증자료 (데이터브릿지)</a:t>
+              <a:t>자재BOM·유해물질한도 및 배상한도성능규격·기술원 시험성적서 (데이터브릿지)</a:t>
             </a:r>
           </a:p>
         </p:txBody>
@@ -52436,7 +52436,7 @@
                   <a:srgbClr val="6B7280"/>
                 </a:solidFill>
               </a:rPr>
-              <a:t>  시안 원본, 결과서</a:t>
+              <a:t>  계약·도서 원본, 결과서</a:t>
             </a:r>
           </a:p>
         </p:txBody>
@@ -52758,7 +52758,7 @@
                   <a:srgbClr val="6B7280"/>
                 </a:solidFill>
               </a:rPr>
-              <a:t>한빛글로벌 SyncGuard AI 시스템 구축 착수보고서</a:t>
+              <a:t>한빛글로벌 SyncFlow AI 시스템 구축 착수보고서</a:t>
             </a:r>
           </a:p>
         </p:txBody>
@@ -52973,7 +52973,7 @@
                   <a:srgbClr val="6B7280"/>
                 </a:solidFill>
               </a:rPr>
-              <a:t>규칙 점검, 근거 검색, 문맥 판정을 차례로 거치고, 최종 확정은 RA 전문가가 합니다.</a:t>
+              <a:t>규칙 점검, 근거 검색, 문맥 판정을 차례로 거치고, 최종 확정은 법무·QA 전문위원가 합니다.</a:t>
             </a:r>
           </a:p>
         </p:txBody>
@@ -53061,7 +53061,7 @@
                   <a:srgbClr val="4B5563"/>
                 </a:solidFill>
               </a:rPr>
-              <a:t>시안과 영상 피크프레임·미세각주를 파싱하고 OCR로 심의 문장과 위치를 뽑습니다.</a:t>
+              <a:t>계약·도서과 도면 핵심규격·특약주석를 파싱하고 OCR로 검증 문장과 위치를 뽑습니다.</a:t>
             </a:r>
           </a:p>
         </p:txBody>
@@ -53281,7 +53281,7 @@
                   <a:srgbClr val="4B5563"/>
                 </a:solidFill>
               </a:rPr>
-              <a:t>문장과 관련된 규제 조항, 실증자료, 과거 심의 상충 사례를 찾습니다.</a:t>
+              <a:t>문장과 관련된 규제 조항, 시험성적서, 과거 검증 상충 사례를 찾습니다.</a:t>
             </a:r>
           </a:p>
         </p:txBody>
@@ -53481,7 +53481,7 @@
                   <a:srgbClr val="FFFFFF"/>
                 </a:solidFill>
               </a:rPr>
-              <a:t>RA 최종 확정</a:t>
+              <a:t>QA 최종 확정</a:t>
             </a:r>
           </a:p>
           <a:p>
@@ -53499,7 +53499,7 @@
                   <a:srgbClr val="DCE4F2"/>
                 </a:solidFill>
               </a:rPr>
-              <a:t>AI 결과를 검토해 등급과 문구를 확정합니다.</a:t>
+              <a:t>AI 결과를 검토해 등급과 조항을 확정합니다.</a:t>
             </a:r>
           </a:p>
         </p:txBody>
@@ -53582,7 +53582,7 @@
                   <a:srgbClr val="374151"/>
                 </a:solidFill>
               </a:rPr>
-              <a:t>의약품 오인 표현</a:t>
+              <a:t>불공정 독소조항 표현</a:t>
             </a:r>
           </a:p>
         </p:txBody>
@@ -53627,7 +53627,7 @@
                   <a:srgbClr val="374151"/>
                 </a:solidFill>
               </a:rPr>
-              <a:t>신체 부위 표현</a:t>
+              <a:t>부당 원가전가 표현</a:t>
             </a:r>
           </a:p>
         </p:txBody>
@@ -53762,7 +53762,7 @@
                   <a:srgbClr val="374151"/>
                 </a:solidFill>
               </a:rPr>
-              <a:t>기능성 오인 표현</a:t>
+              <a:t>핵심규격 오인 표현</a:t>
             </a:r>
           </a:p>
         </p:txBody>
@@ -53916,7 +53916,7 @@
                   <a:srgbClr val="374151"/>
                 </a:solidFill>
               </a:rPr>
-              <a:t>애매한 표현은 보수적으로 남겨 RA가 직접 확인합니다.</a:t>
+              <a:t>애매한 표현은 보수적으로 남겨 QA가 직접 확인합니다.</a:t>
             </a:r>
           </a:p>
         </p:txBody>
@@ -54201,7 +54201,7 @@
                   <a:srgbClr val="374151"/>
                 </a:solidFill>
               </a:rPr>
-              <a:t>AI 결과는 검토를 돕는 권고안이며, 최종 심의는 RA 담당자가 확정합니다.</a:t>
+              <a:t>AI 결과는 검토를 돕는 권고안이며, 최종 검증은 법무·QA 담당자가 확정합니다.</a:t>
             </a:r>
           </a:p>
           <a:p>
@@ -54292,7 +54292,7 @@
                   <a:srgbClr val="6B7280"/>
                 </a:solidFill>
               </a:rPr>
-              <a:t>한빛글로벌 SyncGuard AI 시스템 구축 착수보고서</a:t>
+              <a:t>한빛글로벌 SyncFlow AI 시스템 구축 착수보고서</a:t>
             </a:r>
           </a:p>
         </p:txBody>
